--- a/Presentations/Presentation_1_12_workshop.pptx
+++ b/Presentations/Presentation_1_12_workshop.pptx
@@ -7,17 +7,18 @@
   <p:sldIdLst>
     <p:sldId id="256" r:id="rId2"/>
     <p:sldId id="266" r:id="rId3"/>
-    <p:sldId id="267" r:id="rId4"/>
-    <p:sldId id="269" r:id="rId5"/>
+    <p:sldId id="269" r:id="rId4"/>
+    <p:sldId id="279" r:id="rId5"/>
     <p:sldId id="270" r:id="rId6"/>
-    <p:sldId id="271" r:id="rId7"/>
-    <p:sldId id="272" r:id="rId8"/>
-    <p:sldId id="273" r:id="rId9"/>
-    <p:sldId id="274" r:id="rId10"/>
-    <p:sldId id="275" r:id="rId11"/>
-    <p:sldId id="276" r:id="rId12"/>
-    <p:sldId id="277" r:id="rId13"/>
-    <p:sldId id="278" r:id="rId14"/>
+    <p:sldId id="272" r:id="rId7"/>
+    <p:sldId id="280" r:id="rId8"/>
+    <p:sldId id="274" r:id="rId9"/>
+    <p:sldId id="283" r:id="rId10"/>
+    <p:sldId id="281" r:id="rId11"/>
+    <p:sldId id="277" r:id="rId12"/>
+    <p:sldId id="276" r:id="rId13"/>
+    <p:sldId id="282" r:id="rId14"/>
+    <p:sldId id="278" r:id="rId15"/>
   </p:sldIdLst>
   <p:sldSz cx="12192000" cy="6858000"/>
   <p:notesSz cx="6858000" cy="9144000"/>
@@ -271,7 +272,7 @@
           <a:p>
             <a:fld id="{DC8C2447-2EA4-4E44-AB8D-C4FC61A7E730}" type="datetimeFigureOut">
               <a:rPr lang="en-US" smtClean="0"/>
-              <a:t>12/4/2025</a:t>
+              <a:t>12/9/2025</a:t>
             </a:fld>
             <a:endParaRPr lang="en-US"/>
           </a:p>
@@ -469,7 +470,7 @@
           <a:p>
             <a:fld id="{DC8C2447-2EA4-4E44-AB8D-C4FC61A7E730}" type="datetimeFigureOut">
               <a:rPr lang="en-US" smtClean="0"/>
-              <a:t>12/4/2025</a:t>
+              <a:t>12/9/2025</a:t>
             </a:fld>
             <a:endParaRPr lang="en-US"/>
           </a:p>
@@ -677,7 +678,7 @@
           <a:p>
             <a:fld id="{DC8C2447-2EA4-4E44-AB8D-C4FC61A7E730}" type="datetimeFigureOut">
               <a:rPr lang="en-US" smtClean="0"/>
-              <a:t>12/4/2025</a:t>
+              <a:t>12/9/2025</a:t>
             </a:fld>
             <a:endParaRPr lang="en-US"/>
           </a:p>
@@ -875,7 +876,7 @@
           <a:p>
             <a:fld id="{DC8C2447-2EA4-4E44-AB8D-C4FC61A7E730}" type="datetimeFigureOut">
               <a:rPr lang="en-US" smtClean="0"/>
-              <a:t>12/4/2025</a:t>
+              <a:t>12/9/2025</a:t>
             </a:fld>
             <a:endParaRPr lang="en-US"/>
           </a:p>
@@ -1150,7 +1151,7 @@
           <a:p>
             <a:fld id="{DC8C2447-2EA4-4E44-AB8D-C4FC61A7E730}" type="datetimeFigureOut">
               <a:rPr lang="en-US" smtClean="0"/>
-              <a:t>12/4/2025</a:t>
+              <a:t>12/9/2025</a:t>
             </a:fld>
             <a:endParaRPr lang="en-US"/>
           </a:p>
@@ -1415,7 +1416,7 @@
           <a:p>
             <a:fld id="{DC8C2447-2EA4-4E44-AB8D-C4FC61A7E730}" type="datetimeFigureOut">
               <a:rPr lang="en-US" smtClean="0"/>
-              <a:t>12/4/2025</a:t>
+              <a:t>12/9/2025</a:t>
             </a:fld>
             <a:endParaRPr lang="en-US"/>
           </a:p>
@@ -1827,7 +1828,7 @@
           <a:p>
             <a:fld id="{DC8C2447-2EA4-4E44-AB8D-C4FC61A7E730}" type="datetimeFigureOut">
               <a:rPr lang="en-US" smtClean="0"/>
-              <a:t>12/4/2025</a:t>
+              <a:t>12/9/2025</a:t>
             </a:fld>
             <a:endParaRPr lang="en-US"/>
           </a:p>
@@ -1968,7 +1969,7 @@
           <a:p>
             <a:fld id="{DC8C2447-2EA4-4E44-AB8D-C4FC61A7E730}" type="datetimeFigureOut">
               <a:rPr lang="en-US" smtClean="0"/>
-              <a:t>12/4/2025</a:t>
+              <a:t>12/9/2025</a:t>
             </a:fld>
             <a:endParaRPr lang="en-US"/>
           </a:p>
@@ -2081,7 +2082,7 @@
           <a:p>
             <a:fld id="{DC8C2447-2EA4-4E44-AB8D-C4FC61A7E730}" type="datetimeFigureOut">
               <a:rPr lang="en-US" smtClean="0"/>
-              <a:t>12/4/2025</a:t>
+              <a:t>12/9/2025</a:t>
             </a:fld>
             <a:endParaRPr lang="en-US"/>
           </a:p>
@@ -2392,7 +2393,7 @@
           <a:p>
             <a:fld id="{DC8C2447-2EA4-4E44-AB8D-C4FC61A7E730}" type="datetimeFigureOut">
               <a:rPr lang="en-US" smtClean="0"/>
-              <a:t>12/4/2025</a:t>
+              <a:t>12/9/2025</a:t>
             </a:fld>
             <a:endParaRPr lang="en-US"/>
           </a:p>
@@ -2680,7 +2681,7 @@
           <a:p>
             <a:fld id="{DC8C2447-2EA4-4E44-AB8D-C4FC61A7E730}" type="datetimeFigureOut">
               <a:rPr lang="en-US" smtClean="0"/>
-              <a:t>12/4/2025</a:t>
+              <a:t>12/9/2025</a:t>
             </a:fld>
             <a:endParaRPr lang="en-US"/>
           </a:p>
@@ -2921,7 +2922,7 @@
           <a:p>
             <a:fld id="{DC8C2447-2EA4-4E44-AB8D-C4FC61A7E730}" type="datetimeFigureOut">
               <a:rPr lang="en-US" smtClean="0"/>
-              <a:t>12/4/2025</a:t>
+              <a:t>12/9/2025</a:t>
             </a:fld>
             <a:endParaRPr lang="en-US"/>
           </a:p>
@@ -3471,7 +3472,7 @@
         <p:cNvPr id="1" name="">
           <a:extLst>
             <a:ext uri="{FF2B5EF4-FFF2-40B4-BE49-F238E27FC236}">
-              <a16:creationId xmlns:a16="http://schemas.microsoft.com/office/drawing/2014/main" id="{277F93EF-53E1-C31A-68D0-15C3B04F4EEC}"/>
+              <a16:creationId xmlns:a16="http://schemas.microsoft.com/office/drawing/2014/main" id="{6A03347A-B556-747F-1AB1-9CB362F5CE23}"/>
             </a:ext>
           </a:extLst>
         </p:cNvPr>
@@ -3491,7 +3492,7 @@
           <p:cNvPr id="9" name="Rectangle 8">
             <a:extLst>
               <a:ext uri="{FF2B5EF4-FFF2-40B4-BE49-F238E27FC236}">
-                <a16:creationId xmlns:a16="http://schemas.microsoft.com/office/drawing/2014/main" id="{040E1487-A163-11E9-21A8-CD85D6065048}"/>
+                <a16:creationId xmlns:a16="http://schemas.microsoft.com/office/drawing/2014/main" id="{E14CE020-F86B-BBF8-4262-DB058C04D7CA}"/>
               </a:ext>
               <a:ext uri="{C183D7F6-B498-43B3-948B-1728B52AA6E4}">
                 <adec:decorative xmlns:adec="http://schemas.microsoft.com/office/drawing/2017/decorative" val="1"/>
@@ -3554,7 +3555,7 @@
           <p:cNvPr id="11" name="Rectangle 10">
             <a:extLst>
               <a:ext uri="{FF2B5EF4-FFF2-40B4-BE49-F238E27FC236}">
-                <a16:creationId xmlns:a16="http://schemas.microsoft.com/office/drawing/2014/main" id="{C39F7442-D5AB-D560-A54C-59351BFF14D0}"/>
+                <a16:creationId xmlns:a16="http://schemas.microsoft.com/office/drawing/2014/main" id="{657F63E9-239B-5EB9-CD7D-A749A0C325CB}"/>
               </a:ext>
               <a:ext uri="{C183D7F6-B498-43B3-948B-1728B52AA6E4}">
                 <adec:decorative xmlns:adec="http://schemas.microsoft.com/office/drawing/2017/decorative" val="1"/>
@@ -3617,7 +3618,7 @@
           <p:cNvPr id="2" name="Title 1">
             <a:extLst>
               <a:ext uri="{FF2B5EF4-FFF2-40B4-BE49-F238E27FC236}">
-                <a16:creationId xmlns:a16="http://schemas.microsoft.com/office/drawing/2014/main" id="{E3B3DF85-1B8D-E171-5556-B55950833C24}"/>
+                <a16:creationId xmlns:a16="http://schemas.microsoft.com/office/drawing/2014/main" id="{6296F24D-9104-BE3D-9125-5CF120915B7D}"/>
               </a:ext>
             </a:extLst>
           </p:cNvPr>
@@ -3661,7 +3662,7 @@
                 <a:ea typeface="+mj-ea"/>
                 <a:cs typeface="+mj-cs"/>
               </a:rPr>
-              <a:t>Solution:</a:t>
+              <a:t>Solution 2:</a:t>
             </a:r>
             <a:br>
               <a:rPr lang="en-US" sz="2600" kern="1200" dirty="0">
@@ -3692,74 +3693,45 @@
                 <a:ea typeface="+mj-ea"/>
                 <a:cs typeface="+mj-cs"/>
               </a:rPr>
-              <a:t>BCA</a:t>
-            </a:r>
-          </a:p>
-        </p:txBody>
-      </p:sp>
-      <p:sp>
-        <p:nvSpPr>
-          <p:cNvPr id="3" name="TextBox 2">
-            <a:extLst>
-              <a:ext uri="{FF2B5EF4-FFF2-40B4-BE49-F238E27FC236}">
-                <a16:creationId xmlns:a16="http://schemas.microsoft.com/office/drawing/2014/main" id="{0C4D1711-0C67-AE14-148F-5A818B5CCD96}"/>
-              </a:ext>
-            </a:extLst>
-          </p:cNvPr>
-          <p:cNvSpPr txBox="1"/>
+              <a:t>linear BCA</a:t>
+            </a:r>
+          </a:p>
+        </p:txBody>
+      </p:sp>
+      <p:pic>
+        <p:nvPicPr>
+          <p:cNvPr id="10" name="Picture 9">
+            <a:extLst>
+              <a:ext uri="{FF2B5EF4-FFF2-40B4-BE49-F238E27FC236}">
+                <a16:creationId xmlns:a16="http://schemas.microsoft.com/office/drawing/2014/main" id="{1B25E881-E768-970E-A5B7-BEC4546AD36D}"/>
+              </a:ext>
+            </a:extLst>
+          </p:cNvPr>
+          <p:cNvPicPr>
+            <a:picLocks noChangeAspect="1"/>
+          </p:cNvPicPr>
           <p:nvPr/>
-        </p:nvSpPr>
+        </p:nvPicPr>
+        <p:blipFill>
+          <a:blip r:embed="rId2"/>
+          <a:stretch>
+            <a:fillRect/>
+          </a:stretch>
+        </p:blipFill>
         <p:spPr>
           <a:xfrm>
-            <a:off x="9163251" y="981777"/>
-            <a:ext cx="2165684" cy="923330"/>
+            <a:off x="4130563" y="318653"/>
+            <a:ext cx="5944430" cy="6220693"/>
           </a:xfrm>
           <a:prstGeom prst="rect">
             <a:avLst/>
           </a:prstGeom>
-          <a:noFill/>
         </p:spPr>
-        <p:txBody>
-          <a:bodyPr wrap="square" rtlCol="0">
-            <a:spAutoFit/>
-          </a:bodyPr>
-          <a:lstStyle/>
-          <a:p>
-            <a:r>
-              <a:rPr lang="en-US" b="1" dirty="0"/>
-              <a:t>B</a:t>
-            </a:r>
-            <a:r>
-              <a:rPr lang="en-US" dirty="0"/>
-              <a:t>aseline</a:t>
-            </a:r>
-          </a:p>
-          <a:p>
-            <a:r>
-              <a:rPr lang="en-US" b="1" dirty="0"/>
-              <a:t>C</a:t>
-            </a:r>
-            <a:r>
-              <a:rPr lang="en-US" dirty="0"/>
-              <a:t>ovariate</a:t>
-            </a:r>
-          </a:p>
-          <a:p>
-            <a:r>
-              <a:rPr lang="en-US" b="1" dirty="0"/>
-              <a:t>A</a:t>
-            </a:r>
-            <a:r>
-              <a:rPr lang="en-US" dirty="0"/>
-              <a:t>djustment</a:t>
-            </a:r>
-          </a:p>
-        </p:txBody>
-      </p:sp>
+      </p:pic>
     </p:spTree>
     <p:extLst>
       <p:ext uri="{BB962C8B-B14F-4D97-AF65-F5344CB8AC3E}">
-        <p14:creationId xmlns:p14="http://schemas.microsoft.com/office/powerpoint/2010/main" val="2685153792"/>
+        <p14:creationId xmlns:p14="http://schemas.microsoft.com/office/powerpoint/2010/main" val="3048484623"/>
       </p:ext>
     </p:extLst>
   </p:cSld>
@@ -3785,7 +3757,7 @@
         <p:cNvPr id="1" name="">
           <a:extLst>
             <a:ext uri="{FF2B5EF4-FFF2-40B4-BE49-F238E27FC236}">
-              <a16:creationId xmlns:a16="http://schemas.microsoft.com/office/drawing/2014/main" id="{2148E8BA-3539-D8F1-B1C3-61C7DC3C9092}"/>
+              <a16:creationId xmlns:a16="http://schemas.microsoft.com/office/drawing/2014/main" id="{1690E057-DDB1-A5D9-C79A-961DCED081FF}"/>
             </a:ext>
           </a:extLst>
         </p:cNvPr>
@@ -3805,7 +3777,7 @@
           <p:cNvPr id="9" name="Rectangle 8">
             <a:extLst>
               <a:ext uri="{FF2B5EF4-FFF2-40B4-BE49-F238E27FC236}">
-                <a16:creationId xmlns:a16="http://schemas.microsoft.com/office/drawing/2014/main" id="{6F3739F6-C798-222C-9F3B-F81CBDD7A223}"/>
+                <a16:creationId xmlns:a16="http://schemas.microsoft.com/office/drawing/2014/main" id="{6CBAD2F2-0076-1C5E-9A4A-578E173EB42C}"/>
               </a:ext>
               <a:ext uri="{C183D7F6-B498-43B3-948B-1728B52AA6E4}">
                 <adec:decorative xmlns:adec="http://schemas.microsoft.com/office/drawing/2017/decorative" val="1"/>
@@ -3868,7 +3840,7 @@
           <p:cNvPr id="11" name="Rectangle 10">
             <a:extLst>
               <a:ext uri="{FF2B5EF4-FFF2-40B4-BE49-F238E27FC236}">
-                <a16:creationId xmlns:a16="http://schemas.microsoft.com/office/drawing/2014/main" id="{4085E62D-035C-608A-4D31-8C2CDABD2414}"/>
+                <a16:creationId xmlns:a16="http://schemas.microsoft.com/office/drawing/2014/main" id="{1FB8E4C1-EAD1-2B25-63AE-D3439DBF3399}"/>
               </a:ext>
               <a:ext uri="{C183D7F6-B498-43B3-948B-1728B52AA6E4}">
                 <adec:decorative xmlns:adec="http://schemas.microsoft.com/office/drawing/2017/decorative" val="1"/>
@@ -3931,7 +3903,7 @@
           <p:cNvPr id="2" name="Title 1">
             <a:extLst>
               <a:ext uri="{FF2B5EF4-FFF2-40B4-BE49-F238E27FC236}">
-                <a16:creationId xmlns:a16="http://schemas.microsoft.com/office/drawing/2014/main" id="{82A8097E-4CF2-BFC3-1C61-1BB079DB7B41}"/>
+                <a16:creationId xmlns:a16="http://schemas.microsoft.com/office/drawing/2014/main" id="{2A2966AE-D2DE-61B6-F0CE-CFC5DA9174D8}"/>
               </a:ext>
             </a:extLst>
           </p:cNvPr>
@@ -3975,7 +3947,7 @@
                 <a:ea typeface="+mj-ea"/>
                 <a:cs typeface="+mj-cs"/>
               </a:rPr>
-              <a:t>Problem:</a:t>
+              <a:t>Solution 2:</a:t>
             </a:r>
             <a:br>
               <a:rPr lang="en-US" sz="2600" kern="1200" dirty="0">
@@ -4006,112 +3978,45 @@
                 <a:ea typeface="+mj-ea"/>
                 <a:cs typeface="+mj-cs"/>
               </a:rPr>
-              <a:t>Non-linearity</a:t>
+              <a:t>linear BCA</a:t>
             </a:r>
           </a:p>
         </p:txBody>
       </p:sp>
       <p:pic>
         <p:nvPicPr>
-          <p:cNvPr id="4" name="Content Placeholder 4" descr="A drawing of a graph&#10;&#10;AI-generated content may be incorrect.">
-            <a:extLst>
-              <a:ext uri="{FF2B5EF4-FFF2-40B4-BE49-F238E27FC236}">
-                <a16:creationId xmlns:a16="http://schemas.microsoft.com/office/drawing/2014/main" id="{2432FA6F-101C-DC03-66E6-8D191800D8D0}"/>
+          <p:cNvPr id="6" name="Picture 5">
+            <a:extLst>
+              <a:ext uri="{FF2B5EF4-FFF2-40B4-BE49-F238E27FC236}">
+                <a16:creationId xmlns:a16="http://schemas.microsoft.com/office/drawing/2014/main" id="{72264CE5-0048-B20F-6923-FEFE8E47C2C1}"/>
               </a:ext>
             </a:extLst>
           </p:cNvPr>
           <p:cNvPicPr>
-            <a:picLocks noGrp="1" noChangeAspect="1"/>
+            <a:picLocks noChangeAspect="1"/>
           </p:cNvPicPr>
-          <p:nvPr>
-            <p:ph idx="1"/>
-          </p:nvPr>
+          <p:nvPr/>
         </p:nvPicPr>
         <p:blipFill>
-          <a:blip r:embed="rId2">
-            <a:extLst>
-              <a:ext uri="{28A0092B-C50C-407E-A947-70E740481C1C}">
-                <a14:useLocalDpi xmlns:a14="http://schemas.microsoft.com/office/drawing/2010/main" val="0"/>
-              </a:ext>
-            </a:extLst>
-          </a:blip>
+          <a:blip r:embed="rId2"/>
           <a:stretch>
             <a:fillRect/>
           </a:stretch>
         </p:blipFill>
         <p:spPr>
           <a:xfrm>
-            <a:off x="4345095" y="1476765"/>
-            <a:ext cx="6812820" cy="4428334"/>
+            <a:off x="4032514" y="962966"/>
+            <a:ext cx="7716327" cy="5182323"/>
           </a:xfrm>
           <a:prstGeom prst="rect">
             <a:avLst/>
           </a:prstGeom>
         </p:spPr>
       </p:pic>
-      <p:sp>
-        <p:nvSpPr>
-          <p:cNvPr id="3" name="TextBox 2">
-            <a:extLst>
-              <a:ext uri="{FF2B5EF4-FFF2-40B4-BE49-F238E27FC236}">
-                <a16:creationId xmlns:a16="http://schemas.microsoft.com/office/drawing/2014/main" id="{D1459105-DBA7-9E4E-781E-628F971026F1}"/>
-              </a:ext>
-            </a:extLst>
-          </p:cNvPr>
-          <p:cNvSpPr txBox="1"/>
-          <p:nvPr/>
-        </p:nvSpPr>
-        <p:spPr>
-          <a:xfrm>
-            <a:off x="9172876" y="952901"/>
-            <a:ext cx="2165684" cy="923330"/>
-          </a:xfrm>
-          <a:prstGeom prst="rect">
-            <a:avLst/>
-          </a:prstGeom>
-          <a:noFill/>
-        </p:spPr>
-        <p:txBody>
-          <a:bodyPr wrap="square" rtlCol="0">
-            <a:spAutoFit/>
-          </a:bodyPr>
-          <a:lstStyle/>
-          <a:p>
-            <a:r>
-              <a:rPr lang="en-US" b="1" dirty="0"/>
-              <a:t>B</a:t>
-            </a:r>
-            <a:r>
-              <a:rPr lang="en-US" dirty="0"/>
-              <a:t>aseline</a:t>
-            </a:r>
-          </a:p>
-          <a:p>
-            <a:r>
-              <a:rPr lang="en-US" b="1" dirty="0"/>
-              <a:t>C</a:t>
-            </a:r>
-            <a:r>
-              <a:rPr lang="en-US" dirty="0"/>
-              <a:t>ovariate</a:t>
-            </a:r>
-          </a:p>
-          <a:p>
-            <a:r>
-              <a:rPr lang="en-US" b="1" dirty="0"/>
-              <a:t>A</a:t>
-            </a:r>
-            <a:r>
-              <a:rPr lang="en-US" dirty="0"/>
-              <a:t>djustment</a:t>
-            </a:r>
-          </a:p>
-        </p:txBody>
-      </p:sp>
     </p:spTree>
     <p:extLst>
       <p:ext uri="{BB962C8B-B14F-4D97-AF65-F5344CB8AC3E}">
-        <p14:creationId xmlns:p14="http://schemas.microsoft.com/office/powerpoint/2010/main" val="307623078"/>
+        <p14:creationId xmlns:p14="http://schemas.microsoft.com/office/powerpoint/2010/main" val="2183207082"/>
       </p:ext>
     </p:extLst>
   </p:cSld>
@@ -4137,7 +4042,7 @@
         <p:cNvPr id="1" name="">
           <a:extLst>
             <a:ext uri="{FF2B5EF4-FFF2-40B4-BE49-F238E27FC236}">
-              <a16:creationId xmlns:a16="http://schemas.microsoft.com/office/drawing/2014/main" id="{1690E057-DDB1-A5D9-C79A-961DCED081FF}"/>
+              <a16:creationId xmlns:a16="http://schemas.microsoft.com/office/drawing/2014/main" id="{2148E8BA-3539-D8F1-B1C3-61C7DC3C9092}"/>
             </a:ext>
           </a:extLst>
         </p:cNvPr>
@@ -4157,7 +4062,7 @@
           <p:cNvPr id="9" name="Rectangle 8">
             <a:extLst>
               <a:ext uri="{FF2B5EF4-FFF2-40B4-BE49-F238E27FC236}">
-                <a16:creationId xmlns:a16="http://schemas.microsoft.com/office/drawing/2014/main" id="{6CBAD2F2-0076-1C5E-9A4A-578E173EB42C}"/>
+                <a16:creationId xmlns:a16="http://schemas.microsoft.com/office/drawing/2014/main" id="{6F3739F6-C798-222C-9F3B-F81CBDD7A223}"/>
               </a:ext>
               <a:ext uri="{C183D7F6-B498-43B3-948B-1728B52AA6E4}">
                 <adec:decorative xmlns:adec="http://schemas.microsoft.com/office/drawing/2017/decorative" val="1"/>
@@ -4220,7 +4125,7 @@
           <p:cNvPr id="11" name="Rectangle 10">
             <a:extLst>
               <a:ext uri="{FF2B5EF4-FFF2-40B4-BE49-F238E27FC236}">
-                <a16:creationId xmlns:a16="http://schemas.microsoft.com/office/drawing/2014/main" id="{1FB8E4C1-EAD1-2B25-63AE-D3439DBF3399}"/>
+                <a16:creationId xmlns:a16="http://schemas.microsoft.com/office/drawing/2014/main" id="{4085E62D-035C-608A-4D31-8C2CDABD2414}"/>
               </a:ext>
               <a:ext uri="{C183D7F6-B498-43B3-948B-1728B52AA6E4}">
                 <adec:decorative xmlns:adec="http://schemas.microsoft.com/office/drawing/2017/decorative" val="1"/>
@@ -4283,7 +4188,7 @@
           <p:cNvPr id="2" name="Title 1">
             <a:extLst>
               <a:ext uri="{FF2B5EF4-FFF2-40B4-BE49-F238E27FC236}">
-                <a16:creationId xmlns:a16="http://schemas.microsoft.com/office/drawing/2014/main" id="{2A2966AE-D2DE-61B6-F0CE-CFC5DA9174D8}"/>
+                <a16:creationId xmlns:a16="http://schemas.microsoft.com/office/drawing/2014/main" id="{82A8097E-4CF2-BFC3-1C61-1BB079DB7B41}"/>
               </a:ext>
             </a:extLst>
           </p:cNvPr>
@@ -4327,7 +4232,7 @@
                 <a:ea typeface="+mj-ea"/>
                 <a:cs typeface="+mj-cs"/>
               </a:rPr>
-              <a:t>Solution:</a:t>
+              <a:t>Problem 3:</a:t>
             </a:r>
             <a:br>
               <a:rPr lang="en-US" sz="2600" kern="1200" dirty="0">
@@ -4358,15 +4263,45 @@
                 <a:ea typeface="+mj-ea"/>
                 <a:cs typeface="+mj-cs"/>
               </a:rPr>
-              <a:t>ML methods</a:t>
-            </a:r>
-          </a:p>
-        </p:txBody>
-      </p:sp>
+              <a:t>Non-linearity</a:t>
+            </a:r>
+          </a:p>
+        </p:txBody>
+      </p:sp>
+      <p:pic>
+        <p:nvPicPr>
+          <p:cNvPr id="8" name="Picture 7">
+            <a:extLst>
+              <a:ext uri="{FF2B5EF4-FFF2-40B4-BE49-F238E27FC236}">
+                <a16:creationId xmlns:a16="http://schemas.microsoft.com/office/drawing/2014/main" id="{F4B26288-8BB3-C64D-FB27-693728216771}"/>
+              </a:ext>
+            </a:extLst>
+          </p:cNvPr>
+          <p:cNvPicPr>
+            <a:picLocks noChangeAspect="1"/>
+          </p:cNvPicPr>
+          <p:nvPr/>
+        </p:nvPicPr>
+        <p:blipFill>
+          <a:blip r:embed="rId2"/>
+          <a:stretch>
+            <a:fillRect/>
+          </a:stretch>
+        </p:blipFill>
+        <p:spPr>
+          <a:xfrm>
+            <a:off x="3662403" y="812029"/>
+            <a:ext cx="5868219" cy="5772956"/>
+          </a:xfrm>
+          <a:prstGeom prst="rect">
+            <a:avLst/>
+          </a:prstGeom>
+        </p:spPr>
+      </p:pic>
     </p:spTree>
     <p:extLst>
       <p:ext uri="{BB962C8B-B14F-4D97-AF65-F5344CB8AC3E}">
-        <p14:creationId xmlns:p14="http://schemas.microsoft.com/office/powerpoint/2010/main" val="2183207082"/>
+        <p14:creationId xmlns:p14="http://schemas.microsoft.com/office/powerpoint/2010/main" val="307623078"/>
       </p:ext>
     </p:extLst>
   </p:cSld>
@@ -4392,7 +4327,7 @@
         <p:cNvPr id="1" name="">
           <a:extLst>
             <a:ext uri="{FF2B5EF4-FFF2-40B4-BE49-F238E27FC236}">
-              <a16:creationId xmlns:a16="http://schemas.microsoft.com/office/drawing/2014/main" id="{6DB35CB0-E4D0-5BBF-4024-07E2CAC9B203}"/>
+              <a16:creationId xmlns:a16="http://schemas.microsoft.com/office/drawing/2014/main" id="{45C0FF31-345B-B0A8-FC5E-FDAEFBAB426A}"/>
             </a:ext>
           </a:extLst>
         </p:cNvPr>
@@ -4412,7 +4347,7 @@
           <p:cNvPr id="9" name="Rectangle 8">
             <a:extLst>
               <a:ext uri="{FF2B5EF4-FFF2-40B4-BE49-F238E27FC236}">
-                <a16:creationId xmlns:a16="http://schemas.microsoft.com/office/drawing/2014/main" id="{562D227C-2FAF-792A-1180-F890CEABB0E7}"/>
+                <a16:creationId xmlns:a16="http://schemas.microsoft.com/office/drawing/2014/main" id="{193C7988-1ED9-30A5-DB65-4E0692DB9ABA}"/>
               </a:ext>
               <a:ext uri="{C183D7F6-B498-43B3-948B-1728B52AA6E4}">
                 <adec:decorative xmlns:adec="http://schemas.microsoft.com/office/drawing/2017/decorative" val="1"/>
@@ -4475,7 +4410,7 @@
           <p:cNvPr id="11" name="Rectangle 10">
             <a:extLst>
               <a:ext uri="{FF2B5EF4-FFF2-40B4-BE49-F238E27FC236}">
-                <a16:creationId xmlns:a16="http://schemas.microsoft.com/office/drawing/2014/main" id="{2A49E4C9-82AC-7D9B-28E0-8FF6DB2724DE}"/>
+                <a16:creationId xmlns:a16="http://schemas.microsoft.com/office/drawing/2014/main" id="{CA674308-637F-EE75-730E-C62B308F1084}"/>
               </a:ext>
               <a:ext uri="{C183D7F6-B498-43B3-948B-1728B52AA6E4}">
                 <adec:decorative xmlns:adec="http://schemas.microsoft.com/office/drawing/2017/decorative" val="1"/>
@@ -4538,7 +4473,7 @@
           <p:cNvPr id="2" name="Title 1">
             <a:extLst>
               <a:ext uri="{FF2B5EF4-FFF2-40B4-BE49-F238E27FC236}">
-                <a16:creationId xmlns:a16="http://schemas.microsoft.com/office/drawing/2014/main" id="{DB76E750-F3CE-7F16-D523-9716E613C38A}"/>
+                <a16:creationId xmlns:a16="http://schemas.microsoft.com/office/drawing/2014/main" id="{6D561F54-8BE1-30EC-7E61-66C1400CE7C5}"/>
               </a:ext>
             </a:extLst>
           </p:cNvPr>
@@ -4582,6 +4517,291 @@
                 <a:ea typeface="+mj-ea"/>
                 <a:cs typeface="+mj-cs"/>
               </a:rPr>
+              <a:t>Solution 3:</a:t>
+            </a:r>
+            <a:br>
+              <a:rPr lang="en-US" sz="2600" kern="1200" dirty="0">
+                <a:solidFill>
+                  <a:srgbClr val="FFFFFF"/>
+                </a:solidFill>
+                <a:latin typeface="+mj-lt"/>
+                <a:ea typeface="+mj-ea"/>
+                <a:cs typeface="+mj-cs"/>
+              </a:rPr>
+            </a:br>
+            <a:br>
+              <a:rPr lang="en-US" sz="2600" kern="1200" dirty="0">
+                <a:solidFill>
+                  <a:srgbClr val="FFFFFF"/>
+                </a:solidFill>
+                <a:latin typeface="+mj-lt"/>
+                <a:ea typeface="+mj-ea"/>
+                <a:cs typeface="+mj-cs"/>
+              </a:rPr>
+            </a:br>
+            <a:r>
+              <a:rPr lang="en-US" sz="2600" kern="1200" dirty="0">
+                <a:solidFill>
+                  <a:srgbClr val="FFFFFF"/>
+                </a:solidFill>
+                <a:latin typeface="+mj-lt"/>
+                <a:ea typeface="+mj-ea"/>
+                <a:cs typeface="+mj-cs"/>
+              </a:rPr>
+              <a:t>Machine learning</a:t>
+            </a:r>
+          </a:p>
+        </p:txBody>
+      </p:sp>
+      <p:pic>
+        <p:nvPicPr>
+          <p:cNvPr id="13" name="Picture 12">
+            <a:extLst>
+              <a:ext uri="{FF2B5EF4-FFF2-40B4-BE49-F238E27FC236}">
+                <a16:creationId xmlns:a16="http://schemas.microsoft.com/office/drawing/2014/main" id="{99A746C0-43E6-EC59-AF53-BF40526DACB4}"/>
+              </a:ext>
+            </a:extLst>
+          </p:cNvPr>
+          <p:cNvPicPr>
+            <a:picLocks noChangeAspect="1"/>
+          </p:cNvPicPr>
+          <p:nvPr/>
+        </p:nvPicPr>
+        <p:blipFill>
+          <a:blip r:embed="rId2"/>
+          <a:stretch>
+            <a:fillRect/>
+          </a:stretch>
+        </p:blipFill>
+        <p:spPr>
+          <a:xfrm>
+            <a:off x="3597680" y="933019"/>
+            <a:ext cx="8337646" cy="5166992"/>
+          </a:xfrm>
+          <a:prstGeom prst="rect">
+            <a:avLst/>
+          </a:prstGeom>
+        </p:spPr>
+      </p:pic>
+    </p:spTree>
+    <p:extLst>
+      <p:ext uri="{BB962C8B-B14F-4D97-AF65-F5344CB8AC3E}">
+        <p14:creationId xmlns:p14="http://schemas.microsoft.com/office/powerpoint/2010/main" val="3566366608"/>
+      </p:ext>
+    </p:extLst>
+  </p:cSld>
+  <p:clrMapOvr>
+    <a:masterClrMapping/>
+  </p:clrMapOvr>
+</p:sld>
+</file>
+
+<file path=ppt/slides/slide14.xml><?xml version="1.0" encoding="utf-8"?>
+<p:sld xmlns:a="http://schemas.openxmlformats.org/drawingml/2006/main" xmlns:r="http://schemas.openxmlformats.org/officeDocument/2006/relationships" xmlns:p="http://schemas.openxmlformats.org/presentationml/2006/main">
+  <p:cSld>
+    <p:bg>
+      <p:bgPr>
+        <a:solidFill>
+          <a:schemeClr val="bg1"/>
+        </a:solidFill>
+        <a:effectLst/>
+      </p:bgPr>
+    </p:bg>
+    <p:spTree>
+      <p:nvGrpSpPr>
+        <p:cNvPr id="1" name="">
+          <a:extLst>
+            <a:ext uri="{FF2B5EF4-FFF2-40B4-BE49-F238E27FC236}">
+              <a16:creationId xmlns:a16="http://schemas.microsoft.com/office/drawing/2014/main" id="{6DB35CB0-E4D0-5BBF-4024-07E2CAC9B203}"/>
+            </a:ext>
+          </a:extLst>
+        </p:cNvPr>
+        <p:cNvGrpSpPr/>
+        <p:nvPr/>
+      </p:nvGrpSpPr>
+      <p:grpSpPr>
+        <a:xfrm>
+          <a:off x="0" y="0"/>
+          <a:ext cx="0" cy="0"/>
+          <a:chOff x="0" y="0"/>
+          <a:chExt cx="0" cy="0"/>
+        </a:xfrm>
+      </p:grpSpPr>
+      <p:sp>
+        <p:nvSpPr>
+          <p:cNvPr id="9" name="Rectangle 8">
+            <a:extLst>
+              <a:ext uri="{FF2B5EF4-FFF2-40B4-BE49-F238E27FC236}">
+                <a16:creationId xmlns:a16="http://schemas.microsoft.com/office/drawing/2014/main" id="{562D227C-2FAF-792A-1180-F890CEABB0E7}"/>
+              </a:ext>
+              <a:ext uri="{C183D7F6-B498-43B3-948B-1728B52AA6E4}">
+                <adec:decorative xmlns:adec="http://schemas.microsoft.com/office/drawing/2017/decorative" val="1"/>
+              </a:ext>
+            </a:extLst>
+          </p:cNvPr>
+          <p:cNvSpPr>
+            <a:spLocks noGrp="1" noRot="1" noChangeAspect="1" noMove="1" noResize="1" noEditPoints="1" noAdjustHandles="1" noChangeArrowheads="1" noChangeShapeType="1" noTextEdit="1"/>
+          </p:cNvSpPr>
+          <p:nvPr>
+            <p:extLst>
+              <p:ext uri="{386F3935-93C4-4BCD-93E2-E3B085C9AB24}">
+                <p16:designElem xmlns:p16="http://schemas.microsoft.com/office/powerpoint/2015/main" val="1"/>
+              </p:ext>
+            </p:extLst>
+          </p:nvPr>
+        </p:nvSpPr>
+        <p:spPr>
+          <a:xfrm>
+            <a:off x="0" y="0"/>
+            <a:ext cx="12192000" cy="6858000"/>
+          </a:xfrm>
+          <a:prstGeom prst="rect">
+            <a:avLst/>
+          </a:prstGeom>
+          <a:solidFill>
+            <a:srgbClr val="FFFFFF"/>
+          </a:solidFill>
+          <a:ln>
+            <a:noFill/>
+          </a:ln>
+        </p:spPr>
+        <p:style>
+          <a:lnRef idx="2">
+            <a:schemeClr val="accent1">
+              <a:shade val="50000"/>
+            </a:schemeClr>
+          </a:lnRef>
+          <a:fillRef idx="1">
+            <a:schemeClr val="accent1"/>
+          </a:fillRef>
+          <a:effectRef idx="0">
+            <a:schemeClr val="accent1"/>
+          </a:effectRef>
+          <a:fontRef idx="minor">
+            <a:schemeClr val="lt1"/>
+          </a:fontRef>
+        </p:style>
+        <p:txBody>
+          <a:bodyPr rtlCol="0" anchor="ctr"/>
+          <a:lstStyle/>
+          <a:p>
+            <a:pPr algn="ctr"/>
+            <a:endParaRPr lang="en-US"/>
+          </a:p>
+        </p:txBody>
+      </p:sp>
+      <p:sp>
+        <p:nvSpPr>
+          <p:cNvPr id="11" name="Rectangle 10">
+            <a:extLst>
+              <a:ext uri="{FF2B5EF4-FFF2-40B4-BE49-F238E27FC236}">
+                <a16:creationId xmlns:a16="http://schemas.microsoft.com/office/drawing/2014/main" id="{2A49E4C9-82AC-7D9B-28E0-8FF6DB2724DE}"/>
+              </a:ext>
+              <a:ext uri="{C183D7F6-B498-43B3-948B-1728B52AA6E4}">
+                <adec:decorative xmlns:adec="http://schemas.microsoft.com/office/drawing/2017/decorative" val="1"/>
+              </a:ext>
+            </a:extLst>
+          </p:cNvPr>
+          <p:cNvSpPr>
+            <a:spLocks noGrp="1" noRot="1" noChangeAspect="1" noMove="1" noResize="1" noEditPoints="1" noAdjustHandles="1" noChangeArrowheads="1" noChangeShapeType="1" noTextEdit="1"/>
+          </p:cNvSpPr>
+          <p:nvPr>
+            <p:extLst>
+              <p:ext uri="{386F3935-93C4-4BCD-93E2-E3B085C9AB24}">
+                <p16:designElem xmlns:p16="http://schemas.microsoft.com/office/powerpoint/2015/main" val="1"/>
+              </p:ext>
+            </p:extLst>
+          </p:nvPr>
+        </p:nvSpPr>
+        <p:spPr>
+          <a:xfrm>
+            <a:off x="0" y="0"/>
+            <a:ext cx="2013557" cy="6858000"/>
+          </a:xfrm>
+          <a:prstGeom prst="rect">
+            <a:avLst/>
+          </a:prstGeom>
+          <a:solidFill>
+            <a:srgbClr val="7F7F7F"/>
+          </a:solidFill>
+          <a:ln>
+            <a:noFill/>
+          </a:ln>
+        </p:spPr>
+        <p:style>
+          <a:lnRef idx="2">
+            <a:schemeClr val="accent1">
+              <a:shade val="50000"/>
+            </a:schemeClr>
+          </a:lnRef>
+          <a:fillRef idx="1">
+            <a:schemeClr val="accent1"/>
+          </a:fillRef>
+          <a:effectRef idx="0">
+            <a:schemeClr val="accent1"/>
+          </a:effectRef>
+          <a:fontRef idx="minor">
+            <a:schemeClr val="lt1"/>
+          </a:fontRef>
+        </p:style>
+        <p:txBody>
+          <a:bodyPr rtlCol="0" anchor="ctr"/>
+          <a:lstStyle/>
+          <a:p>
+            <a:pPr algn="ctr"/>
+            <a:endParaRPr lang="en-US"/>
+          </a:p>
+        </p:txBody>
+      </p:sp>
+      <p:sp>
+        <p:nvSpPr>
+          <p:cNvPr id="2" name="Title 1">
+            <a:extLst>
+              <a:ext uri="{FF2B5EF4-FFF2-40B4-BE49-F238E27FC236}">
+                <a16:creationId xmlns:a16="http://schemas.microsoft.com/office/drawing/2014/main" id="{DB76E750-F3CE-7F16-D523-9716E613C38A}"/>
+              </a:ext>
+            </a:extLst>
+          </p:cNvPr>
+          <p:cNvSpPr>
+            <a:spLocks noGrp="1"/>
+          </p:cNvSpPr>
+          <p:nvPr>
+            <p:ph type="title"/>
+          </p:nvPr>
+        </p:nvSpPr>
+        <p:spPr>
+          <a:xfrm>
+            <a:off x="640080" y="2074363"/>
+            <a:ext cx="2752354" cy="2709275"/>
+          </a:xfrm>
+          <a:prstGeom prst="ellipse">
+            <a:avLst/>
+          </a:prstGeom>
+          <a:solidFill>
+            <a:srgbClr val="262626"/>
+          </a:solidFill>
+          <a:ln w="174625" cmpd="thinThick">
+            <a:solidFill>
+              <a:srgbClr val="262626"/>
+            </a:solidFill>
+          </a:ln>
+        </p:spPr>
+        <p:txBody>
+          <a:bodyPr vert="horz" lIns="91440" tIns="45720" rIns="91440" bIns="45720" rtlCol="0" anchor="ctr">
+            <a:normAutofit/>
+          </a:bodyPr>
+          <a:lstStyle/>
+          <a:p>
+            <a:pPr algn="ctr"/>
+            <a:r>
+              <a:rPr lang="en-US" sz="2600" b="1" kern="1200" dirty="0">
+                <a:solidFill>
+                  <a:srgbClr val="FFFFFF"/>
+                </a:solidFill>
+                <a:latin typeface="+mj-lt"/>
+                <a:ea typeface="+mj-ea"/>
+                <a:cs typeface="+mj-cs"/>
+              </a:rPr>
               <a:t>Conclusion</a:t>
             </a:r>
             <a:endParaRPr lang="en-US" sz="2600" kern="1200" dirty="0">
@@ -4595,44 +4815,284 @@
           </a:p>
         </p:txBody>
       </p:sp>
-      <p:pic>
-        <p:nvPicPr>
-          <p:cNvPr id="3" name="Content Placeholder 4" descr="A diagram of a machine learning&#10;&#10;AI-generated content may be incorrect.">
-            <a:extLst>
-              <a:ext uri="{FF2B5EF4-FFF2-40B4-BE49-F238E27FC236}">
-                <a16:creationId xmlns:a16="http://schemas.microsoft.com/office/drawing/2014/main" id="{F781A1EB-838F-B404-3C5C-C397D8C24D5B}"/>
-              </a:ext>
-            </a:extLst>
-          </p:cNvPr>
-          <p:cNvPicPr>
-            <a:picLocks noGrp="1" noChangeAspect="1"/>
-          </p:cNvPicPr>
-          <p:nvPr>
-            <p:ph idx="1"/>
-          </p:nvPr>
-        </p:nvPicPr>
-        <p:blipFill>
-          <a:blip r:embed="rId2">
-            <a:extLst>
-              <a:ext uri="{28A0092B-C50C-407E-A947-70E740481C1C}">
-                <a14:useLocalDpi xmlns:a14="http://schemas.microsoft.com/office/drawing/2010/main" val="0"/>
-              </a:ext>
-            </a:extLst>
-          </a:blip>
-          <a:stretch>
-            <a:fillRect/>
-          </a:stretch>
-        </p:blipFill>
-        <p:spPr>
+      <p:grpSp>
+        <p:nvGrpSpPr>
+          <p:cNvPr id="3" name="Group 2">
+            <a:extLst>
+              <a:ext uri="{FF2B5EF4-FFF2-40B4-BE49-F238E27FC236}">
+                <a16:creationId xmlns:a16="http://schemas.microsoft.com/office/drawing/2014/main" id="{E7AEFE71-9F06-381A-1524-22981FE43BB6}"/>
+              </a:ext>
+            </a:extLst>
+          </p:cNvPr>
+          <p:cNvGrpSpPr>
+            <a:grpSpLocks noChangeAspect="1"/>
+          </p:cNvGrpSpPr>
+          <p:nvPr/>
+        </p:nvGrpSpPr>
+        <p:grpSpPr>
           <a:xfrm>
-            <a:off x="4313976" y="643466"/>
-            <a:ext cx="5181092" cy="5571067"/>
+            <a:off x="5053008" y="617597"/>
+            <a:ext cx="3855018" cy="5905677"/>
+            <a:chOff x="4708880" y="969014"/>
+            <a:chExt cx="3448248" cy="5310697"/>
           </a:xfrm>
-          <a:prstGeom prst="rect">
-            <a:avLst/>
-          </a:prstGeom>
-        </p:spPr>
-      </p:pic>
+        </p:grpSpPr>
+        <p:pic>
+          <p:nvPicPr>
+            <p:cNvPr id="6" name="Picture 5">
+              <a:extLst>
+                <a:ext uri="{FF2B5EF4-FFF2-40B4-BE49-F238E27FC236}">
+                  <a16:creationId xmlns:a16="http://schemas.microsoft.com/office/drawing/2014/main" id="{36550579-CB14-5DAD-E14F-2A632B386E46}"/>
+                </a:ext>
+              </a:extLst>
+            </p:cNvPr>
+            <p:cNvPicPr>
+              <a:picLocks noChangeAspect="1"/>
+            </p:cNvPicPr>
+            <p:nvPr/>
+          </p:nvPicPr>
+          <p:blipFill>
+            <a:blip r:embed="rId2"/>
+            <a:srcRect t="5129"/>
+            <a:stretch>
+              <a:fillRect/>
+            </a:stretch>
+          </p:blipFill>
+          <p:spPr>
+            <a:xfrm>
+              <a:off x="4708880" y="969014"/>
+              <a:ext cx="3448248" cy="5310697"/>
+            </a:xfrm>
+            <a:prstGeom prst="rect">
+              <a:avLst/>
+            </a:prstGeom>
+          </p:spPr>
+        </p:pic>
+        <p:sp>
+          <p:nvSpPr>
+            <p:cNvPr id="8" name="Rectangle 7">
+              <a:extLst>
+                <a:ext uri="{FF2B5EF4-FFF2-40B4-BE49-F238E27FC236}">
+                  <a16:creationId xmlns:a16="http://schemas.microsoft.com/office/drawing/2014/main" id="{E96CFA0D-5B8D-65FA-336F-091054E7FC32}"/>
+                </a:ext>
+              </a:extLst>
+            </p:cNvPr>
+            <p:cNvSpPr/>
+            <p:nvPr/>
+          </p:nvSpPr>
+          <p:spPr>
+            <a:xfrm>
+              <a:off x="7735672" y="1264484"/>
+              <a:ext cx="332510" cy="1708729"/>
+            </a:xfrm>
+            <a:prstGeom prst="rect">
+              <a:avLst/>
+            </a:prstGeom>
+            <a:solidFill>
+              <a:srgbClr val="FF0000">
+                <a:alpha val="30000"/>
+              </a:srgbClr>
+            </a:solidFill>
+            <a:ln>
+              <a:solidFill>
+                <a:srgbClr val="FF0000"/>
+              </a:solidFill>
+            </a:ln>
+          </p:spPr>
+          <p:style>
+            <a:lnRef idx="2">
+              <a:schemeClr val="accent1">
+                <a:shade val="15000"/>
+              </a:schemeClr>
+            </a:lnRef>
+            <a:fillRef idx="1">
+              <a:schemeClr val="accent1"/>
+            </a:fillRef>
+            <a:effectRef idx="0">
+              <a:schemeClr val="accent1"/>
+            </a:effectRef>
+            <a:fontRef idx="minor">
+              <a:schemeClr val="lt1"/>
+            </a:fontRef>
+          </p:style>
+          <p:txBody>
+            <a:bodyPr rtlCol="0" anchor="ctr"/>
+            <a:lstStyle/>
+            <a:p>
+              <a:pPr algn="ctr"/>
+              <a:endParaRPr lang="en-US"/>
+            </a:p>
+          </p:txBody>
+        </p:sp>
+        <p:sp>
+          <p:nvSpPr>
+            <p:cNvPr id="10" name="Rectangle 9">
+              <a:extLst>
+                <a:ext uri="{FF2B5EF4-FFF2-40B4-BE49-F238E27FC236}">
+                  <a16:creationId xmlns:a16="http://schemas.microsoft.com/office/drawing/2014/main" id="{E7BD544B-8A48-E745-228E-F80992914190}"/>
+                </a:ext>
+              </a:extLst>
+            </p:cNvPr>
+            <p:cNvSpPr/>
+            <p:nvPr/>
+          </p:nvSpPr>
+          <p:spPr>
+            <a:xfrm>
+              <a:off x="6156268" y="3301102"/>
+              <a:ext cx="332510" cy="1708729"/>
+            </a:xfrm>
+            <a:prstGeom prst="rect">
+              <a:avLst/>
+            </a:prstGeom>
+            <a:solidFill>
+              <a:srgbClr val="FF0000">
+                <a:alpha val="30000"/>
+              </a:srgbClr>
+            </a:solidFill>
+            <a:ln>
+              <a:solidFill>
+                <a:srgbClr val="FF0000"/>
+              </a:solidFill>
+            </a:ln>
+          </p:spPr>
+          <p:style>
+            <a:lnRef idx="2">
+              <a:schemeClr val="accent1">
+                <a:shade val="15000"/>
+              </a:schemeClr>
+            </a:lnRef>
+            <a:fillRef idx="1">
+              <a:schemeClr val="accent1"/>
+            </a:fillRef>
+            <a:effectRef idx="0">
+              <a:schemeClr val="accent1"/>
+            </a:effectRef>
+            <a:fontRef idx="minor">
+              <a:schemeClr val="lt1"/>
+            </a:fontRef>
+          </p:style>
+          <p:txBody>
+            <a:bodyPr rtlCol="0" anchor="ctr"/>
+            <a:lstStyle/>
+            <a:p>
+              <a:pPr algn="ctr"/>
+              <a:endParaRPr lang="en-US"/>
+            </a:p>
+          </p:txBody>
+        </p:sp>
+        <p:sp>
+          <p:nvSpPr>
+            <p:cNvPr id="12" name="Rectangle 11">
+              <a:extLst>
+                <a:ext uri="{FF2B5EF4-FFF2-40B4-BE49-F238E27FC236}">
+                  <a16:creationId xmlns:a16="http://schemas.microsoft.com/office/drawing/2014/main" id="{4822715F-72EA-CF87-11CE-278FCBBEF54A}"/>
+                </a:ext>
+              </a:extLst>
+            </p:cNvPr>
+            <p:cNvSpPr/>
+            <p:nvPr/>
+          </p:nvSpPr>
+          <p:spPr>
+            <a:xfrm>
+              <a:off x="7735672" y="3301102"/>
+              <a:ext cx="332510" cy="1708729"/>
+            </a:xfrm>
+            <a:prstGeom prst="rect">
+              <a:avLst/>
+            </a:prstGeom>
+            <a:solidFill>
+              <a:srgbClr val="FF0000">
+                <a:alpha val="30000"/>
+              </a:srgbClr>
+            </a:solidFill>
+            <a:ln>
+              <a:solidFill>
+                <a:srgbClr val="FF0000"/>
+              </a:solidFill>
+            </a:ln>
+          </p:spPr>
+          <p:style>
+            <a:lnRef idx="2">
+              <a:schemeClr val="accent1">
+                <a:shade val="15000"/>
+              </a:schemeClr>
+            </a:lnRef>
+            <a:fillRef idx="1">
+              <a:schemeClr val="accent1"/>
+            </a:fillRef>
+            <a:effectRef idx="0">
+              <a:schemeClr val="accent1"/>
+            </a:effectRef>
+            <a:fontRef idx="minor">
+              <a:schemeClr val="lt1"/>
+            </a:fontRef>
+          </p:style>
+          <p:txBody>
+            <a:bodyPr rtlCol="0" anchor="ctr"/>
+            <a:lstStyle/>
+            <a:p>
+              <a:pPr algn="ctr"/>
+              <a:endParaRPr lang="en-US"/>
+            </a:p>
+          </p:txBody>
+        </p:sp>
+        <p:sp>
+          <p:nvSpPr>
+            <p:cNvPr id="13" name="Rectangle 12">
+              <a:extLst>
+                <a:ext uri="{FF2B5EF4-FFF2-40B4-BE49-F238E27FC236}">
+                  <a16:creationId xmlns:a16="http://schemas.microsoft.com/office/drawing/2014/main" id="{785ACCB7-8C67-5B9C-6952-AAE98572F1B3}"/>
+                </a:ext>
+              </a:extLst>
+            </p:cNvPr>
+            <p:cNvSpPr/>
+            <p:nvPr/>
+          </p:nvSpPr>
+          <p:spPr>
+            <a:xfrm>
+              <a:off x="6156268" y="1258402"/>
+              <a:ext cx="332510" cy="1708729"/>
+            </a:xfrm>
+            <a:prstGeom prst="rect">
+              <a:avLst/>
+            </a:prstGeom>
+            <a:solidFill>
+              <a:srgbClr val="FF0000">
+                <a:alpha val="30000"/>
+              </a:srgbClr>
+            </a:solidFill>
+            <a:ln>
+              <a:solidFill>
+                <a:srgbClr val="FF0000"/>
+              </a:solidFill>
+            </a:ln>
+          </p:spPr>
+          <p:style>
+            <a:lnRef idx="2">
+              <a:schemeClr val="accent1">
+                <a:shade val="15000"/>
+              </a:schemeClr>
+            </a:lnRef>
+            <a:fillRef idx="1">
+              <a:schemeClr val="accent1"/>
+            </a:fillRef>
+            <a:effectRef idx="0">
+              <a:schemeClr val="accent1"/>
+            </a:effectRef>
+            <a:fontRef idx="minor">
+              <a:schemeClr val="lt1"/>
+            </a:fontRef>
+          </p:style>
+          <p:txBody>
+            <a:bodyPr rtlCol="0" anchor="ctr"/>
+            <a:lstStyle/>
+            <a:p>
+              <a:pPr algn="ctr"/>
+              <a:endParaRPr lang="en-US"/>
+            </a:p>
+          </p:txBody>
+        </p:sp>
+      </p:grpSp>
     </p:spTree>
     <p:extLst>
       <p:ext uri="{BB962C8B-B14F-4D97-AF65-F5344CB8AC3E}">
@@ -4749,7 +5209,13 @@
     </p:bg>
     <p:spTree>
       <p:nvGrpSpPr>
-        <p:cNvPr id="1" name=""/>
+        <p:cNvPr id="1" name="">
+          <a:extLst>
+            <a:ext uri="{FF2B5EF4-FFF2-40B4-BE49-F238E27FC236}">
+              <a16:creationId xmlns:a16="http://schemas.microsoft.com/office/drawing/2014/main" id="{F4E8C4E4-8C2D-A8A0-1D66-17DCC172674A}"/>
+            </a:ext>
+          </a:extLst>
+        </p:cNvPr>
         <p:cNvGrpSpPr/>
         <p:nvPr/>
       </p:nvGrpSpPr>
@@ -4766,7 +5232,7 @@
           <p:cNvPr id="9" name="Rectangle 8">
             <a:extLst>
               <a:ext uri="{FF2B5EF4-FFF2-40B4-BE49-F238E27FC236}">
-                <a16:creationId xmlns:a16="http://schemas.microsoft.com/office/drawing/2014/main" id="{6753252F-4873-4F63-801D-CC719279A7D5}"/>
+                <a16:creationId xmlns:a16="http://schemas.microsoft.com/office/drawing/2014/main" id="{7129056A-F4A1-8C97-B6E5-12CA8D740472}"/>
               </a:ext>
               <a:ext uri="{C183D7F6-B498-43B3-948B-1728B52AA6E4}">
                 <adec:decorative xmlns:adec="http://schemas.microsoft.com/office/drawing/2017/decorative" val="1"/>
@@ -4829,7 +5295,7 @@
           <p:cNvPr id="11" name="Rectangle 10">
             <a:extLst>
               <a:ext uri="{FF2B5EF4-FFF2-40B4-BE49-F238E27FC236}">
-                <a16:creationId xmlns:a16="http://schemas.microsoft.com/office/drawing/2014/main" id="{047C8CCB-F95D-4249-92DD-651249D3535A}"/>
+                <a16:creationId xmlns:a16="http://schemas.microsoft.com/office/drawing/2014/main" id="{E9A76E22-A707-8728-53AE-54B660C1CC7B}"/>
               </a:ext>
               <a:ext uri="{C183D7F6-B498-43B3-948B-1728B52AA6E4}">
                 <adec:decorative xmlns:adec="http://schemas.microsoft.com/office/drawing/2017/decorative" val="1"/>
@@ -4892,7 +5358,7 @@
           <p:cNvPr id="2" name="Title 1">
             <a:extLst>
               <a:ext uri="{FF2B5EF4-FFF2-40B4-BE49-F238E27FC236}">
-                <a16:creationId xmlns:a16="http://schemas.microsoft.com/office/drawing/2014/main" id="{8E73317E-109D-820F-0400-81B36B07D857}"/>
+                <a16:creationId xmlns:a16="http://schemas.microsoft.com/office/drawing/2014/main" id="{504961D0-1098-8656-4027-4B3C50D63DB2}"/>
               </a:ext>
             </a:extLst>
           </p:cNvPr>
@@ -4928,7 +5394,7 @@
           <a:p>
             <a:pPr algn="ctr"/>
             <a:r>
-              <a:rPr lang="en-US" sz="2600" kern="1200">
+              <a:rPr lang="en-US" sz="2600" b="1" kern="1200" dirty="0">
                 <a:solidFill>
                   <a:srgbClr val="FFFFFF"/>
                 </a:solidFill>
@@ -4938,24 +5404,30 @@
               </a:rPr>
               <a:t>Panel data</a:t>
             </a:r>
+            <a:endParaRPr lang="en-US" sz="2600" kern="1200" dirty="0">
+              <a:solidFill>
+                <a:srgbClr val="FFFFFF"/>
+              </a:solidFill>
+              <a:latin typeface="+mj-lt"/>
+              <a:ea typeface="+mj-ea"/>
+              <a:cs typeface="+mj-cs"/>
+            </a:endParaRPr>
           </a:p>
         </p:txBody>
       </p:sp>
       <p:pic>
         <p:nvPicPr>
-          <p:cNvPr id="4" name="Content Placeholder 4" descr="A diagram of a mathematical equation&#10;&#10;AI-generated content may be incorrect.">
-            <a:extLst>
-              <a:ext uri="{FF2B5EF4-FFF2-40B4-BE49-F238E27FC236}">
-                <a16:creationId xmlns:a16="http://schemas.microsoft.com/office/drawing/2014/main" id="{2CB26661-8CB1-771B-B488-A54B12450FEC}"/>
+          <p:cNvPr id="6" name="Picture 5" descr="A diagram of a diagram&#10;&#10;AI-generated content may be incorrect.">
+            <a:extLst>
+              <a:ext uri="{FF2B5EF4-FFF2-40B4-BE49-F238E27FC236}">
+                <a16:creationId xmlns:a16="http://schemas.microsoft.com/office/drawing/2014/main" id="{161F2212-FAD7-4EE4-7657-CA2AF1FCB3BF}"/>
               </a:ext>
             </a:extLst>
           </p:cNvPr>
           <p:cNvPicPr>
-            <a:picLocks noGrp="1" noChangeAspect="1"/>
+            <a:picLocks noChangeAspect="1"/>
           </p:cNvPicPr>
-          <p:nvPr>
-            <p:ph idx="1"/>
-          </p:nvPr>
+          <p:nvPr/>
         </p:nvPicPr>
         <p:blipFill>
           <a:blip r:embed="rId2">
@@ -4971,8 +5443,8 @@
         </p:blipFill>
         <p:spPr>
           <a:xfrm>
-            <a:off x="4038600" y="1612285"/>
-            <a:ext cx="7188199" cy="3630041"/>
+            <a:off x="4153582" y="1888957"/>
+            <a:ext cx="6703717" cy="3080085"/>
           </a:xfrm>
           <a:prstGeom prst="rect">
             <a:avLst/>
@@ -4982,7 +5454,7 @@
     </p:spTree>
     <p:extLst>
       <p:ext uri="{BB962C8B-B14F-4D97-AF65-F5344CB8AC3E}">
-        <p14:creationId xmlns:p14="http://schemas.microsoft.com/office/powerpoint/2010/main" val="617929587"/>
+        <p14:creationId xmlns:p14="http://schemas.microsoft.com/office/powerpoint/2010/main" val="999216320"/>
       </p:ext>
     </p:extLst>
   </p:cSld>
@@ -5008,7 +5480,7 @@
         <p:cNvPr id="1" name="">
           <a:extLst>
             <a:ext uri="{FF2B5EF4-FFF2-40B4-BE49-F238E27FC236}">
-              <a16:creationId xmlns:a16="http://schemas.microsoft.com/office/drawing/2014/main" id="{F4E8C4E4-8C2D-A8A0-1D66-17DCC172674A}"/>
+              <a16:creationId xmlns:a16="http://schemas.microsoft.com/office/drawing/2014/main" id="{0756CD62-64EB-F090-3C1C-EE306B49EF53}"/>
             </a:ext>
           </a:extLst>
         </p:cNvPr>
@@ -5028,7 +5500,7 @@
           <p:cNvPr id="9" name="Rectangle 8">
             <a:extLst>
               <a:ext uri="{FF2B5EF4-FFF2-40B4-BE49-F238E27FC236}">
-                <a16:creationId xmlns:a16="http://schemas.microsoft.com/office/drawing/2014/main" id="{7129056A-F4A1-8C97-B6E5-12CA8D740472}"/>
+                <a16:creationId xmlns:a16="http://schemas.microsoft.com/office/drawing/2014/main" id="{B12CFD2A-7EE9-F331-08CD-A730B01CD8C1}"/>
               </a:ext>
               <a:ext uri="{C183D7F6-B498-43B3-948B-1728B52AA6E4}">
                 <adec:decorative xmlns:adec="http://schemas.microsoft.com/office/drawing/2017/decorative" val="1"/>
@@ -5091,7 +5563,7 @@
           <p:cNvPr id="11" name="Rectangle 10">
             <a:extLst>
               <a:ext uri="{FF2B5EF4-FFF2-40B4-BE49-F238E27FC236}">
-                <a16:creationId xmlns:a16="http://schemas.microsoft.com/office/drawing/2014/main" id="{E9A76E22-A707-8728-53AE-54B660C1CC7B}"/>
+                <a16:creationId xmlns:a16="http://schemas.microsoft.com/office/drawing/2014/main" id="{5B06C657-D188-33CE-5A79-6AD36F2F7848}"/>
               </a:ext>
               <a:ext uri="{C183D7F6-B498-43B3-948B-1728B52AA6E4}">
                 <adec:decorative xmlns:adec="http://schemas.microsoft.com/office/drawing/2017/decorative" val="1"/>
@@ -5154,7 +5626,7 @@
           <p:cNvPr id="2" name="Title 1">
             <a:extLst>
               <a:ext uri="{FF2B5EF4-FFF2-40B4-BE49-F238E27FC236}">
-                <a16:creationId xmlns:a16="http://schemas.microsoft.com/office/drawing/2014/main" id="{504961D0-1098-8656-4027-4B3C50D63DB2}"/>
+                <a16:creationId xmlns:a16="http://schemas.microsoft.com/office/drawing/2014/main" id="{903C1784-033E-A690-53C5-9C9757781400}"/>
               </a:ext>
             </a:extLst>
           </p:cNvPr>
@@ -5198,7 +5670,7 @@
                 <a:ea typeface="+mj-ea"/>
                 <a:cs typeface="+mj-cs"/>
               </a:rPr>
-              <a:t>Problem:</a:t>
+              <a:t>Problem 1:</a:t>
             </a:r>
             <a:br>
               <a:rPr lang="en-US" sz="2600" kern="1200" dirty="0">
@@ -5236,10 +5708,10 @@
       </p:sp>
       <p:pic>
         <p:nvPicPr>
-          <p:cNvPr id="3" name="Content Placeholder 6" descr="A diagram of a person's mind&#10;&#10;AI-generated content may be incorrect.">
-            <a:extLst>
-              <a:ext uri="{FF2B5EF4-FFF2-40B4-BE49-F238E27FC236}">
-                <a16:creationId xmlns:a16="http://schemas.microsoft.com/office/drawing/2014/main" id="{2BBE7BFC-AA30-F0BE-FFDB-48CE6D3FA348}"/>
+          <p:cNvPr id="5" name="Picture 4">
+            <a:extLst>
+              <a:ext uri="{FF2B5EF4-FFF2-40B4-BE49-F238E27FC236}">
+                <a16:creationId xmlns:a16="http://schemas.microsoft.com/office/drawing/2014/main" id="{88607BB6-2C8F-0A1A-28AB-EC394B0D5156}"/>
               </a:ext>
             </a:extLst>
           </p:cNvPr>
@@ -5251,8 +5723,105 @@
         <p:blipFill>
           <a:blip r:embed="rId2">
             <a:extLst>
-              <a:ext uri="{28A0092B-C50C-407E-A947-70E740481C1C}">
-                <a14:useLocalDpi xmlns:a14="http://schemas.microsoft.com/office/drawing/2010/main" val="0"/>
+              <a:ext uri="{BEBA8EAE-BF5A-486C-A8C5-ECC9F3942E4B}">
+                <a14:imgProps xmlns:a14="http://schemas.microsoft.com/office/drawing/2010/main">
+                  <a14:imgLayer r:embed="rId3">
+                    <a14:imgEffect>
+                      <a14:backgroundRemoval t="5281" b="97690" l="102" r="96633">
+                        <a14:foregroundMark x1="6837" y1="24587" x2="5204" y2="44884"/>
+                        <a14:foregroundMark x1="5204" y1="44884" x2="19490" y2="47525"/>
+                        <a14:foregroundMark x1="19490" y1="47525" x2="27143" y2="65512"/>
+                        <a14:foregroundMark x1="27143" y1="65512" x2="38163" y2="68812"/>
+                        <a14:foregroundMark x1="38163" y1="68812" x2="47245" y2="51320"/>
+                        <a14:foregroundMark x1="47245" y1="51320" x2="62041" y2="43234"/>
+                        <a14:foregroundMark x1="62041" y1="43234" x2="73673" y2="43894"/>
+                        <a14:foregroundMark x1="73673" y1="43894" x2="84694" y2="53300"/>
+                        <a14:foregroundMark x1="84694" y1="53300" x2="94184" y2="39109"/>
+                        <a14:foregroundMark x1="94184" y1="39109" x2="95816" y2="59076"/>
+                        <a14:foregroundMark x1="38878" y1="26238" x2="30204" y2="24587"/>
+                        <a14:foregroundMark x1="30204" y1="24587" x2="47347" y2="18977"/>
+                        <a14:foregroundMark x1="51939" y1="16997" x2="28878" y2="25083"/>
+                        <a14:foregroundMark x1="28878" y1="25083" x2="34898" y2="36469"/>
+                        <a14:foregroundMark x1="34898" y1="36469" x2="29286" y2="50990"/>
+                        <a14:foregroundMark x1="29286" y1="50990" x2="42653" y2="56106"/>
+                        <a14:foregroundMark x1="42653" y1="56106" x2="23163" y2="62871"/>
+                        <a14:foregroundMark x1="23163" y1="62871" x2="14490" y2="82013"/>
+                        <a14:foregroundMark x1="14490" y1="82013" x2="21633" y2="90594"/>
+                        <a14:foregroundMark x1="21633" y1="90594" x2="16735" y2="71617"/>
+                        <a14:foregroundMark x1="16735" y1="71617" x2="14694" y2="27393"/>
+                        <a14:foregroundMark x1="14694" y1="27393" x2="39286" y2="19802"/>
+                        <a14:foregroundMark x1="39286" y1="19802" x2="32143" y2="15512"/>
+                        <a14:foregroundMark x1="32143" y1="15512" x2="38163" y2="12211"/>
+                        <a14:foregroundMark x1="38163" y1="12211" x2="53673" y2="12376"/>
+                        <a14:foregroundMark x1="53673" y1="12376" x2="47755" y2="8416"/>
+                        <a14:foregroundMark x1="47755" y1="8416" x2="32347" y2="11386"/>
+                        <a14:foregroundMark x1="32347" y1="11386" x2="47653" y2="13531"/>
+                        <a14:foregroundMark x1="47653" y1="13531" x2="20918" y2="17822"/>
+                        <a14:foregroundMark x1="20918" y1="17822" x2="42449" y2="28713"/>
+                        <a14:foregroundMark x1="42449" y1="28713" x2="53776" y2="42079"/>
+                        <a14:foregroundMark x1="53776" y1="42079" x2="50204" y2="57096"/>
+                        <a14:foregroundMark x1="50204" y1="57096" x2="42755" y2="64521"/>
+                        <a14:foregroundMark x1="42755" y1="64521" x2="52653" y2="76238"/>
+                        <a14:foregroundMark x1="52653" y1="76238" x2="63776" y2="79043"/>
+                        <a14:foregroundMark x1="63776" y1="79043" x2="77347" y2="67162"/>
+                        <a14:foregroundMark x1="77347" y1="67162" x2="68163" y2="56931"/>
+                        <a14:foregroundMark x1="68163" y1="56931" x2="71429" y2="53465"/>
+                        <a14:foregroundMark x1="7245" y1="50990" x2="12449" y2="41584"/>
+                        <a14:foregroundMark x1="12449" y1="41584" x2="11633" y2="43564"/>
+                        <a14:foregroundMark x1="9286" y1="37459" x2="2653" y2="43729"/>
+                        <a14:foregroundMark x1="2653" y1="43729" x2="7347" y2="80363"/>
+                        <a14:foregroundMark x1="7347" y1="80363" x2="12449" y2="86964"/>
+                        <a14:foregroundMark x1="12449" y1="86964" x2="18571" y2="81518"/>
+                        <a14:foregroundMark x1="18571" y1="81518" x2="7347" y2="81188"/>
+                        <a14:foregroundMark x1="7347" y1="81188" x2="11837" y2="91584"/>
+                        <a14:foregroundMark x1="11837" y1="91584" x2="21939" y2="97030"/>
+                        <a14:foregroundMark x1="21939" y1="97030" x2="14082" y2="93399"/>
+                        <a14:foregroundMark x1="14082" y1="93399" x2="10816" y2="83168"/>
+                        <a14:foregroundMark x1="10816" y1="83168" x2="612" y2="83498"/>
+                        <a14:foregroundMark x1="22041" y1="97195" x2="24592" y2="86304"/>
+                        <a14:foregroundMark x1="24592" y1="86304" x2="35408" y2="90264"/>
+                        <a14:foregroundMark x1="35408" y1="90264" x2="50816" y2="84983"/>
+                        <a14:foregroundMark x1="50816" y1="84983" x2="42449" y2="78548"/>
+                        <a14:foregroundMark x1="42449" y1="78548" x2="50510" y2="77888"/>
+                        <a14:foregroundMark x1="74388" y1="86964" x2="62959" y2="82673"/>
+                        <a14:foregroundMark x1="62959" y1="82673" x2="77551" y2="74092"/>
+                        <a14:foregroundMark x1="77551" y1="74092" x2="76020" y2="59571"/>
+                        <a14:foregroundMark x1="76020" y1="59571" x2="59388" y2="57096"/>
+                        <a14:foregroundMark x1="59388" y1="57096" x2="63469" y2="57921"/>
+                        <a14:foregroundMark x1="81939" y1="50660" x2="81429" y2="62211"/>
+                        <a14:foregroundMark x1="81429" y1="62211" x2="87245" y2="67987"/>
+                        <a14:foregroundMark x1="87245" y1="67987" x2="79388" y2="58581"/>
+                        <a14:foregroundMark x1="79388" y1="58581" x2="86939" y2="56931"/>
+                        <a14:foregroundMark x1="86939" y1="56931" x2="87143" y2="55116"/>
+                        <a14:foregroundMark x1="95918" y1="52145" x2="96633" y2="58416"/>
+                        <a14:foregroundMark x1="95510" y1="25908" x2="67143" y2="20627"/>
+                        <a14:foregroundMark x1="67143" y1="20627" x2="41633" y2="7426"/>
+                        <a14:foregroundMark x1="41633" y1="7426" x2="10714" y2="17657"/>
+                        <a14:foregroundMark x1="10714" y1="17657" x2="6735" y2="25908"/>
+                        <a14:foregroundMark x1="6735" y1="25908" x2="7347" y2="25413"/>
+                        <a14:foregroundMark x1="23673" y1="10561" x2="37857" y2="8911"/>
+                        <a14:foregroundMark x1="37857" y1="8911" x2="30306" y2="5611"/>
+                        <a14:foregroundMark x1="30306" y1="5611" x2="40102" y2="7591"/>
+                        <a14:foregroundMark x1="40102" y1="7591" x2="60612" y2="5281"/>
+                        <a14:foregroundMark x1="60612" y1="5281" x2="66735" y2="12211"/>
+                        <a14:foregroundMark x1="66735" y1="12211" x2="78061" y2="12376"/>
+                        <a14:foregroundMark x1="78061" y1="12376" x2="94592" y2="24917"/>
+                        <a14:foregroundMark x1="94592" y1="24917" x2="95816" y2="26403"/>
+                        <a14:foregroundMark x1="30816" y1="85974" x2="15000" y2="86799"/>
+                        <a14:foregroundMark x1="15000" y1="86799" x2="10204" y2="96370"/>
+                        <a14:foregroundMark x1="10204" y1="96370" x2="8367" y2="97690"/>
+                        <a14:foregroundMark x1="40510" y1="25578" x2="46837" y2="27558"/>
+                        <a14:foregroundMark x1="46837" y1="27558" x2="50408" y2="26898"/>
+                        <a14:backgroundMark x1="12143" y1="2475" x2="10918" y2="1320"/>
+                        <a14:backgroundMark x1="13469" y1="3135" x2="10714" y2="1650"/>
+                        <a14:backgroundMark x1="11429" y1="2970" x2="11429" y2="1815"/>
+                        <a14:backgroundMark x1="12551" y1="4785" x2="11122" y2="4125"/>
+                        <a14:backgroundMark x1="11531" y1="4620" x2="12959" y2="4455"/>
+                        <a14:backgroundMark x1="11020" y1="3135" x2="10714" y2="5116"/>
+                      </a14:backgroundRemoval>
+                    </a14:imgEffect>
+                  </a14:imgLayer>
+                </a14:imgProps>
               </a:ext>
             </a:extLst>
           </a:blip>
@@ -5262,8 +5831,8 @@
         </p:blipFill>
         <p:spPr>
           <a:xfrm>
-            <a:off x="4032514" y="1059130"/>
-            <a:ext cx="7621653" cy="4351338"/>
+            <a:off x="3972141" y="1514674"/>
+            <a:ext cx="7640152" cy="4724421"/>
           </a:xfrm>
           <a:prstGeom prst="rect">
             <a:avLst/>
@@ -5273,7 +5842,7 @@
     </p:spTree>
     <p:extLst>
       <p:ext uri="{BB962C8B-B14F-4D97-AF65-F5344CB8AC3E}">
-        <p14:creationId xmlns:p14="http://schemas.microsoft.com/office/powerpoint/2010/main" val="999216320"/>
+        <p14:creationId xmlns:p14="http://schemas.microsoft.com/office/powerpoint/2010/main" val="1141418437"/>
       </p:ext>
     </p:extLst>
   </p:cSld>
@@ -5489,7 +6058,7 @@
                 <a:ea typeface="+mj-ea"/>
                 <a:cs typeface="+mj-cs"/>
               </a:rPr>
-              <a:t>Solution: </a:t>
+              <a:t>Solution 1: </a:t>
             </a:r>
             <a:br>
               <a:rPr lang="en-US" sz="2600" kern="1200" dirty="0">
@@ -5527,145 +6096,34 @@
       </p:sp>
       <p:pic>
         <p:nvPicPr>
-          <p:cNvPr id="7" name="Content Placeholder 4" descr="A comparison of angles and angles&#10;&#10;AI-generated content may be incorrect.">
-            <a:extLst>
-              <a:ext uri="{FF2B5EF4-FFF2-40B4-BE49-F238E27FC236}">
-                <a16:creationId xmlns:a16="http://schemas.microsoft.com/office/drawing/2014/main" id="{7F8256D9-D0E1-D68D-2860-5BD8C6AE440C}"/>
+          <p:cNvPr id="6" name="Picture 5">
+            <a:extLst>
+              <a:ext uri="{FF2B5EF4-FFF2-40B4-BE49-F238E27FC236}">
+                <a16:creationId xmlns:a16="http://schemas.microsoft.com/office/drawing/2014/main" id="{B34DB885-D665-E7DF-CAD5-8AD9A5A69754}"/>
               </a:ext>
             </a:extLst>
           </p:cNvPr>
           <p:cNvPicPr>
-            <a:picLocks noGrp="1" noChangeAspect="1"/>
+            <a:picLocks noChangeAspect="1"/>
           </p:cNvPicPr>
-          <p:nvPr>
-            <p:ph idx="1"/>
-          </p:nvPr>
+          <p:nvPr/>
         </p:nvPicPr>
         <p:blipFill>
-          <a:blip r:embed="rId2">
-            <a:extLst>
-              <a:ext uri="{28A0092B-C50C-407E-A947-70E740481C1C}">
-                <a14:useLocalDpi xmlns:a14="http://schemas.microsoft.com/office/drawing/2010/main" val="0"/>
-              </a:ext>
-            </a:extLst>
-          </a:blip>
-          <a:srcRect r="45325" b="22126"/>
+          <a:blip r:embed="rId2"/>
           <a:stretch>
             <a:fillRect/>
           </a:stretch>
         </p:blipFill>
         <p:spPr>
           <a:xfrm>
-            <a:off x="3797476" y="643466"/>
-            <a:ext cx="6233341" cy="5571067"/>
+            <a:off x="3862606" y="1511918"/>
+            <a:ext cx="7859222" cy="4315427"/>
           </a:xfrm>
           <a:prstGeom prst="rect">
             <a:avLst/>
           </a:prstGeom>
         </p:spPr>
       </p:pic>
-      <p:sp>
-        <p:nvSpPr>
-          <p:cNvPr id="8" name="TextBox 7">
-            <a:extLst>
-              <a:ext uri="{FF2B5EF4-FFF2-40B4-BE49-F238E27FC236}">
-                <a16:creationId xmlns:a16="http://schemas.microsoft.com/office/drawing/2014/main" id="{250F72DD-59D1-F7CE-2A80-7CAB0099216E}"/>
-              </a:ext>
-            </a:extLst>
-          </p:cNvPr>
-          <p:cNvSpPr txBox="1"/>
-          <p:nvPr/>
-        </p:nvSpPr>
-        <p:spPr>
-          <a:xfrm>
-            <a:off x="8345103" y="452387"/>
-            <a:ext cx="4669857" cy="2585323"/>
-          </a:xfrm>
-          <a:prstGeom prst="rect">
-            <a:avLst/>
-          </a:prstGeom>
-          <a:noFill/>
-        </p:spPr>
-        <p:txBody>
-          <a:bodyPr wrap="square" rtlCol="0">
-            <a:spAutoFit/>
-          </a:bodyPr>
-          <a:lstStyle/>
-          <a:p>
-            <a:r>
-              <a:rPr lang="en-US" b="1" dirty="0"/>
-              <a:t>R</a:t>
-            </a:r>
-            <a:r>
-              <a:rPr lang="en-US" dirty="0"/>
-              <a:t>andom</a:t>
-            </a:r>
-          </a:p>
-          <a:p>
-            <a:r>
-              <a:rPr lang="en-US" b="1" dirty="0"/>
-              <a:t>I</a:t>
-            </a:r>
-            <a:r>
-              <a:rPr lang="en-US" dirty="0"/>
-              <a:t>ntercepts</a:t>
-            </a:r>
-          </a:p>
-          <a:p>
-            <a:r>
-              <a:rPr lang="en-US" b="1" dirty="0"/>
-              <a:t>-</a:t>
-            </a:r>
-          </a:p>
-          <a:p>
-            <a:r>
-              <a:rPr lang="en-US" b="1" dirty="0"/>
-              <a:t>C</a:t>
-            </a:r>
-            <a:r>
-              <a:rPr lang="en-US" dirty="0"/>
-              <a:t>ross</a:t>
-            </a:r>
-          </a:p>
-          <a:p>
-            <a:r>
-              <a:rPr lang="en-US" b="1" dirty="0"/>
-              <a:t>L</a:t>
-            </a:r>
-            <a:r>
-              <a:rPr lang="en-US" dirty="0"/>
-              <a:t>agged</a:t>
-            </a:r>
-          </a:p>
-          <a:p>
-            <a:r>
-              <a:rPr lang="en-US" b="1" dirty="0"/>
-              <a:t>P</a:t>
-            </a:r>
-            <a:r>
-              <a:rPr lang="en-US" dirty="0"/>
-              <a:t>anel</a:t>
-            </a:r>
-          </a:p>
-          <a:p>
-            <a:r>
-              <a:rPr lang="en-US" b="1" dirty="0"/>
-              <a:t>M</a:t>
-            </a:r>
-            <a:r>
-              <a:rPr lang="en-US" dirty="0"/>
-              <a:t>odel</a:t>
-            </a:r>
-            <a:endParaRPr lang="en-US" b="1" dirty="0"/>
-          </a:p>
-          <a:p>
-            <a:endParaRPr lang="en-US" dirty="0"/>
-          </a:p>
-          <a:p>
-            <a:endParaRPr lang="en-US" b="1" dirty="0"/>
-          </a:p>
-        </p:txBody>
-      </p:sp>
     </p:spTree>
     <p:extLst>
       <p:ext uri="{BB962C8B-B14F-4D97-AF65-F5344CB8AC3E}">
@@ -5695,7 +6153,7 @@
         <p:cNvPr id="1" name="">
           <a:extLst>
             <a:ext uri="{FF2B5EF4-FFF2-40B4-BE49-F238E27FC236}">
-              <a16:creationId xmlns:a16="http://schemas.microsoft.com/office/drawing/2014/main" id="{6B522910-980D-8140-3D43-9159042D46E8}"/>
+              <a16:creationId xmlns:a16="http://schemas.microsoft.com/office/drawing/2014/main" id="{FF88FE59-4627-27A3-932F-F98F7C3F1DF2}"/>
             </a:ext>
           </a:extLst>
         </p:cNvPr>
@@ -5715,7 +6173,7 @@
           <p:cNvPr id="9" name="Rectangle 8">
             <a:extLst>
               <a:ext uri="{FF2B5EF4-FFF2-40B4-BE49-F238E27FC236}">
-                <a16:creationId xmlns:a16="http://schemas.microsoft.com/office/drawing/2014/main" id="{46C843A5-6BE1-381F-AF03-FA918F030A7F}"/>
+                <a16:creationId xmlns:a16="http://schemas.microsoft.com/office/drawing/2014/main" id="{9378CE4E-4B97-F582-1E42-DE75C3FF0831}"/>
               </a:ext>
               <a:ext uri="{C183D7F6-B498-43B3-948B-1728B52AA6E4}">
                 <adec:decorative xmlns:adec="http://schemas.microsoft.com/office/drawing/2017/decorative" val="1"/>
@@ -5778,7 +6236,7 @@
           <p:cNvPr id="11" name="Rectangle 10">
             <a:extLst>
               <a:ext uri="{FF2B5EF4-FFF2-40B4-BE49-F238E27FC236}">
-                <a16:creationId xmlns:a16="http://schemas.microsoft.com/office/drawing/2014/main" id="{4E23625F-43A9-040C-C51D-DC82C5455DBD}"/>
+                <a16:creationId xmlns:a16="http://schemas.microsoft.com/office/drawing/2014/main" id="{A43E8244-5221-0A17-2041-5CC1B15F60A6}"/>
               </a:ext>
               <a:ext uri="{C183D7F6-B498-43B3-948B-1728B52AA6E4}">
                 <adec:decorative xmlns:adec="http://schemas.microsoft.com/office/drawing/2017/decorative" val="1"/>
@@ -5841,7 +6299,7 @@
           <p:cNvPr id="2" name="Title 1">
             <a:extLst>
               <a:ext uri="{FF2B5EF4-FFF2-40B4-BE49-F238E27FC236}">
-                <a16:creationId xmlns:a16="http://schemas.microsoft.com/office/drawing/2014/main" id="{3D57C2D8-7474-4882-4523-C1ED3BE0DDFF}"/>
+                <a16:creationId xmlns:a16="http://schemas.microsoft.com/office/drawing/2014/main" id="{33B44FDE-B339-CDFD-8F93-20607BB3F352}"/>
               </a:ext>
             </a:extLst>
           </p:cNvPr>
@@ -5885,7 +6343,7 @@
                 <a:ea typeface="+mj-ea"/>
                 <a:cs typeface="+mj-cs"/>
               </a:rPr>
-              <a:t>Solution:</a:t>
+              <a:t>Problem 2:</a:t>
             </a:r>
             <a:br>
               <a:rPr lang="en-US" sz="2600" b="1" kern="1200" dirty="0">
@@ -5898,7 +6356,7 @@
               </a:rPr>
             </a:br>
             <a:br>
-              <a:rPr lang="en-US" sz="2600" kern="1200" dirty="0">
+              <a:rPr lang="en-US" sz="2600" b="1" kern="1200" dirty="0">
                 <a:solidFill>
                   <a:srgbClr val="FFFFFF"/>
                 </a:solidFill>
@@ -5908,7 +6366,7 @@
               </a:rPr>
             </a:br>
             <a:r>
-              <a:rPr lang="en-US" sz="2600" kern="1200" dirty="0">
+              <a:rPr lang="en-US" sz="2600" b="1" kern="1200" dirty="0">
                 <a:solidFill>
                   <a:srgbClr val="FFFFFF"/>
                 </a:solidFill>
@@ -5916,43 +6374,43 @@
                 <a:ea typeface="+mj-ea"/>
                 <a:cs typeface="+mj-cs"/>
               </a:rPr>
-              <a:t>Adjustment</a:t>
-            </a:r>
+              <a:t>Variation</a:t>
+            </a:r>
+            <a:endParaRPr lang="en-US" sz="2600" kern="1200" dirty="0">
+              <a:solidFill>
+                <a:srgbClr val="FFFFFF"/>
+              </a:solidFill>
+              <a:latin typeface="+mj-lt"/>
+              <a:ea typeface="+mj-ea"/>
+              <a:cs typeface="+mj-cs"/>
+            </a:endParaRPr>
           </a:p>
         </p:txBody>
       </p:sp>
       <p:pic>
         <p:nvPicPr>
-          <p:cNvPr id="4" name="Content Placeholder 4" descr="A diagram of a diagram of a social media&#10;&#10;AI-generated content may be incorrect.">
-            <a:extLst>
-              <a:ext uri="{FF2B5EF4-FFF2-40B4-BE49-F238E27FC236}">
-                <a16:creationId xmlns:a16="http://schemas.microsoft.com/office/drawing/2014/main" id="{400EDEE0-81CC-0219-318C-C3980B7C6DF0}"/>
+          <p:cNvPr id="4" name="Picture 3">
+            <a:extLst>
+              <a:ext uri="{FF2B5EF4-FFF2-40B4-BE49-F238E27FC236}">
+                <a16:creationId xmlns:a16="http://schemas.microsoft.com/office/drawing/2014/main" id="{3BA59DA8-C43A-94B0-B1C4-83E90D8344A5}"/>
               </a:ext>
             </a:extLst>
           </p:cNvPr>
           <p:cNvPicPr>
-            <a:picLocks noGrp="1" noChangeAspect="1"/>
+            <a:picLocks noChangeAspect="1"/>
           </p:cNvPicPr>
-          <p:nvPr>
-            <p:ph idx="1"/>
-          </p:nvPr>
+          <p:nvPr/>
         </p:nvPicPr>
         <p:blipFill>
-          <a:blip r:embed="rId2">
-            <a:extLst>
-              <a:ext uri="{28A0092B-C50C-407E-A947-70E740481C1C}">
-                <a14:useLocalDpi xmlns:a14="http://schemas.microsoft.com/office/drawing/2010/main" val="0"/>
-              </a:ext>
-            </a:extLst>
-          </a:blip>
+          <a:blip r:embed="rId2"/>
           <a:stretch>
             <a:fillRect/>
           </a:stretch>
         </p:blipFill>
         <p:spPr>
           <a:xfrm>
-            <a:off x="3923585" y="1493564"/>
-            <a:ext cx="7737263" cy="3675201"/>
+            <a:off x="3882174" y="1467155"/>
+            <a:ext cx="7411484" cy="4963218"/>
           </a:xfrm>
           <a:prstGeom prst="rect">
             <a:avLst/>
@@ -5962,7 +6420,7 @@
     </p:spTree>
     <p:extLst>
       <p:ext uri="{BB962C8B-B14F-4D97-AF65-F5344CB8AC3E}">
-        <p14:creationId xmlns:p14="http://schemas.microsoft.com/office/powerpoint/2010/main" val="254474963"/>
+        <p14:creationId xmlns:p14="http://schemas.microsoft.com/office/powerpoint/2010/main" val="1786034658"/>
       </p:ext>
     </p:extLst>
   </p:cSld>
@@ -5988,7 +6446,7 @@
         <p:cNvPr id="1" name="">
           <a:extLst>
             <a:ext uri="{FF2B5EF4-FFF2-40B4-BE49-F238E27FC236}">
-              <a16:creationId xmlns:a16="http://schemas.microsoft.com/office/drawing/2014/main" id="{FF88FE59-4627-27A3-932F-F98F7C3F1DF2}"/>
+              <a16:creationId xmlns:a16="http://schemas.microsoft.com/office/drawing/2014/main" id="{FFF8EE52-9344-9504-7987-55257B4EE873}"/>
             </a:ext>
           </a:extLst>
         </p:cNvPr>
@@ -6008,7 +6466,7 @@
           <p:cNvPr id="9" name="Rectangle 8">
             <a:extLst>
               <a:ext uri="{FF2B5EF4-FFF2-40B4-BE49-F238E27FC236}">
-                <a16:creationId xmlns:a16="http://schemas.microsoft.com/office/drawing/2014/main" id="{9378CE4E-4B97-F582-1E42-DE75C3FF0831}"/>
+                <a16:creationId xmlns:a16="http://schemas.microsoft.com/office/drawing/2014/main" id="{5520F46B-7BC8-49BF-BED2-37F885595C58}"/>
               </a:ext>
               <a:ext uri="{C183D7F6-B498-43B3-948B-1728B52AA6E4}">
                 <adec:decorative xmlns:adec="http://schemas.microsoft.com/office/drawing/2017/decorative" val="1"/>
@@ -6071,7 +6529,7 @@
           <p:cNvPr id="11" name="Rectangle 10">
             <a:extLst>
               <a:ext uri="{FF2B5EF4-FFF2-40B4-BE49-F238E27FC236}">
-                <a16:creationId xmlns:a16="http://schemas.microsoft.com/office/drawing/2014/main" id="{A43E8244-5221-0A17-2041-5CC1B15F60A6}"/>
+                <a16:creationId xmlns:a16="http://schemas.microsoft.com/office/drawing/2014/main" id="{4E47CE44-350F-5E57-858B-E2FFA173D784}"/>
               </a:ext>
               <a:ext uri="{C183D7F6-B498-43B3-948B-1728B52AA6E4}">
                 <adec:decorative xmlns:adec="http://schemas.microsoft.com/office/drawing/2017/decorative" val="1"/>
@@ -6134,7 +6592,7 @@
           <p:cNvPr id="2" name="Title 1">
             <a:extLst>
               <a:ext uri="{FF2B5EF4-FFF2-40B4-BE49-F238E27FC236}">
-                <a16:creationId xmlns:a16="http://schemas.microsoft.com/office/drawing/2014/main" id="{33B44FDE-B339-CDFD-8F93-20607BB3F352}"/>
+                <a16:creationId xmlns:a16="http://schemas.microsoft.com/office/drawing/2014/main" id="{3B62934D-4632-4BA2-A2F1-F517099024BD}"/>
               </a:ext>
             </a:extLst>
           </p:cNvPr>
@@ -6178,10 +6636,10 @@
                 <a:ea typeface="+mj-ea"/>
                 <a:cs typeface="+mj-cs"/>
               </a:rPr>
-              <a:t>Solution:</a:t>
+              <a:t>Problem 2:</a:t>
             </a:r>
             <a:br>
-              <a:rPr lang="en-US" sz="2600" kern="1200" dirty="0">
+              <a:rPr lang="en-US" sz="2600" b="1" kern="1200" dirty="0">
                 <a:solidFill>
                   <a:srgbClr val="FFFFFF"/>
                 </a:solidFill>
@@ -6191,7 +6649,7 @@
               </a:rPr>
             </a:br>
             <a:br>
-              <a:rPr lang="en-US" sz="2600" kern="1200" dirty="0">
+              <a:rPr lang="en-US" sz="2600" b="1" kern="1200" dirty="0">
                 <a:solidFill>
                   <a:srgbClr val="FFFFFF"/>
                 </a:solidFill>
@@ -6201,7 +6659,7 @@
               </a:rPr>
             </a:br>
             <a:r>
-              <a:rPr lang="en-US" sz="2600" kern="1200" dirty="0">
+              <a:rPr lang="en-US" sz="2600" b="1" kern="1200" dirty="0">
                 <a:solidFill>
                   <a:srgbClr val="FFFFFF"/>
                 </a:solidFill>
@@ -6209,17 +6667,25 @@
                 <a:ea typeface="+mj-ea"/>
                 <a:cs typeface="+mj-cs"/>
               </a:rPr>
-              <a:t>Adjustment</a:t>
-            </a:r>
+              <a:t>Variation</a:t>
+            </a:r>
+            <a:endParaRPr lang="en-US" sz="2600" kern="1200" dirty="0">
+              <a:solidFill>
+                <a:srgbClr val="FFFFFF"/>
+              </a:solidFill>
+              <a:latin typeface="+mj-lt"/>
+              <a:ea typeface="+mj-ea"/>
+              <a:cs typeface="+mj-cs"/>
+            </a:endParaRPr>
           </a:p>
         </p:txBody>
       </p:sp>
       <p:pic>
         <p:nvPicPr>
-          <p:cNvPr id="6" name="Content Placeholder 4">
-            <a:extLst>
-              <a:ext uri="{FF2B5EF4-FFF2-40B4-BE49-F238E27FC236}">
-                <a16:creationId xmlns:a16="http://schemas.microsoft.com/office/drawing/2014/main" id="{38562E70-0BAF-ADE5-A273-244A6219084F}"/>
+          <p:cNvPr id="5" name="Picture 4">
+            <a:extLst>
+              <a:ext uri="{FF2B5EF4-FFF2-40B4-BE49-F238E27FC236}">
+                <a16:creationId xmlns:a16="http://schemas.microsoft.com/office/drawing/2014/main" id="{CA91DFED-94CD-7870-3EA8-ECF7146CE3ED}"/>
               </a:ext>
             </a:extLst>
           </p:cNvPr>
@@ -6236,8 +6702,8 @@
         </p:blipFill>
         <p:spPr>
           <a:xfrm>
-            <a:off x="3860061" y="1655545"/>
-            <a:ext cx="7763246" cy="3706949"/>
+            <a:off x="4204769" y="76786"/>
+            <a:ext cx="7440063" cy="6411220"/>
           </a:xfrm>
           <a:prstGeom prst="rect">
             <a:avLst/>
@@ -6247,7 +6713,7 @@
     </p:spTree>
     <p:extLst>
       <p:ext uri="{BB962C8B-B14F-4D97-AF65-F5344CB8AC3E}">
-        <p14:creationId xmlns:p14="http://schemas.microsoft.com/office/powerpoint/2010/main" val="1786034658"/>
+        <p14:creationId xmlns:p14="http://schemas.microsoft.com/office/powerpoint/2010/main" val="179188338"/>
       </p:ext>
     </p:extLst>
   </p:cSld>
@@ -6273,7 +6739,7 @@
         <p:cNvPr id="1" name="">
           <a:extLst>
             <a:ext uri="{FF2B5EF4-FFF2-40B4-BE49-F238E27FC236}">
-              <a16:creationId xmlns:a16="http://schemas.microsoft.com/office/drawing/2014/main" id="{23E0B42A-AEDD-0D12-2D80-7E87EE9FABBD}"/>
+              <a16:creationId xmlns:a16="http://schemas.microsoft.com/office/drawing/2014/main" id="{0770B514-8ADF-FE83-B0E9-C2E80B33C75C}"/>
             </a:ext>
           </a:extLst>
         </p:cNvPr>
@@ -6293,7 +6759,7 @@
           <p:cNvPr id="9" name="Rectangle 8">
             <a:extLst>
               <a:ext uri="{FF2B5EF4-FFF2-40B4-BE49-F238E27FC236}">
-                <a16:creationId xmlns:a16="http://schemas.microsoft.com/office/drawing/2014/main" id="{AD1AEFD9-E5F3-83DA-CECA-6877074C4E13}"/>
+                <a16:creationId xmlns:a16="http://schemas.microsoft.com/office/drawing/2014/main" id="{0FFEC641-6CE1-9E59-D10B-91F99BAE9ED3}"/>
               </a:ext>
               <a:ext uri="{C183D7F6-B498-43B3-948B-1728B52AA6E4}">
                 <adec:decorative xmlns:adec="http://schemas.microsoft.com/office/drawing/2017/decorative" val="1"/>
@@ -6356,7 +6822,7 @@
           <p:cNvPr id="11" name="Rectangle 10">
             <a:extLst>
               <a:ext uri="{FF2B5EF4-FFF2-40B4-BE49-F238E27FC236}">
-                <a16:creationId xmlns:a16="http://schemas.microsoft.com/office/drawing/2014/main" id="{B91A56F1-DA90-6BD3-7825-27BB8A21D73D}"/>
+                <a16:creationId xmlns:a16="http://schemas.microsoft.com/office/drawing/2014/main" id="{809470E2-85AC-6756-A51A-341A8BB34B58}"/>
               </a:ext>
               <a:ext uri="{C183D7F6-B498-43B3-948B-1728B52AA6E4}">
                 <adec:decorative xmlns:adec="http://schemas.microsoft.com/office/drawing/2017/decorative" val="1"/>
@@ -6419,7 +6885,7 @@
           <p:cNvPr id="2" name="Title 1">
             <a:extLst>
               <a:ext uri="{FF2B5EF4-FFF2-40B4-BE49-F238E27FC236}">
-                <a16:creationId xmlns:a16="http://schemas.microsoft.com/office/drawing/2014/main" id="{B13E5E10-76DB-6AE2-6CF7-826FD942B89C}"/>
+                <a16:creationId xmlns:a16="http://schemas.microsoft.com/office/drawing/2014/main" id="{BD5EDA13-44ED-62EE-3BDD-B26B2DC40A76}"/>
               </a:ext>
             </a:extLst>
           </p:cNvPr>
@@ -6463,7 +6929,7 @@
                 <a:ea typeface="+mj-ea"/>
                 <a:cs typeface="+mj-cs"/>
               </a:rPr>
-              <a:t>Problem:</a:t>
+              <a:t>Problem 2:</a:t>
             </a:r>
             <a:br>
               <a:rPr lang="en-US" sz="2600" kern="1200" dirty="0">
@@ -6494,43 +6960,35 @@
                 <a:ea typeface="+mj-ea"/>
                 <a:cs typeface="+mj-cs"/>
               </a:rPr>
-              <a:t>Adjustment</a:t>
+              <a:t>Variation</a:t>
             </a:r>
           </a:p>
         </p:txBody>
       </p:sp>
       <p:pic>
         <p:nvPicPr>
-          <p:cNvPr id="3" name="Content Placeholder 4" descr="A diagram of a sm2 age&#10;&#10;AI-generated content may be incorrect.">
-            <a:extLst>
-              <a:ext uri="{FF2B5EF4-FFF2-40B4-BE49-F238E27FC236}">
-                <a16:creationId xmlns:a16="http://schemas.microsoft.com/office/drawing/2014/main" id="{F33C0F1D-83F8-7594-1F4D-BB35C719F6FF}"/>
+          <p:cNvPr id="4" name="Picture 3">
+            <a:extLst>
+              <a:ext uri="{FF2B5EF4-FFF2-40B4-BE49-F238E27FC236}">
+                <a16:creationId xmlns:a16="http://schemas.microsoft.com/office/drawing/2014/main" id="{9910E2F3-0171-531F-0B2B-31FB08DF39D8}"/>
               </a:ext>
             </a:extLst>
           </p:cNvPr>
           <p:cNvPicPr>
-            <a:picLocks noGrp="1" noChangeAspect="1"/>
+            <a:picLocks noChangeAspect="1"/>
           </p:cNvPicPr>
-          <p:nvPr>
-            <p:ph idx="1"/>
-          </p:nvPr>
+          <p:nvPr/>
         </p:nvPicPr>
         <p:blipFill>
-          <a:blip r:embed="rId2">
-            <a:extLst>
-              <a:ext uri="{28A0092B-C50C-407E-A947-70E740481C1C}">
-                <a14:useLocalDpi xmlns:a14="http://schemas.microsoft.com/office/drawing/2010/main" val="0"/>
-              </a:ext>
-            </a:extLst>
-          </a:blip>
+          <a:blip r:embed="rId2"/>
           <a:stretch>
             <a:fillRect/>
           </a:stretch>
         </p:blipFill>
         <p:spPr>
           <a:xfrm>
-            <a:off x="4065751" y="643466"/>
-            <a:ext cx="7452931" cy="5571067"/>
+            <a:off x="3762579" y="949666"/>
+            <a:ext cx="8059275" cy="5401429"/>
           </a:xfrm>
           <a:prstGeom prst="rect">
             <a:avLst/>
@@ -6540,7 +6998,7 @@
     </p:spTree>
     <p:extLst>
       <p:ext uri="{BB962C8B-B14F-4D97-AF65-F5344CB8AC3E}">
-        <p14:creationId xmlns:p14="http://schemas.microsoft.com/office/powerpoint/2010/main" val="1777512988"/>
+        <p14:creationId xmlns:p14="http://schemas.microsoft.com/office/powerpoint/2010/main" val="3318415008"/>
       </p:ext>
     </p:extLst>
   </p:cSld>
@@ -6566,7 +7024,7 @@
         <p:cNvPr id="1" name="">
           <a:extLst>
             <a:ext uri="{FF2B5EF4-FFF2-40B4-BE49-F238E27FC236}">
-              <a16:creationId xmlns:a16="http://schemas.microsoft.com/office/drawing/2014/main" id="{0770B514-8ADF-FE83-B0E9-C2E80B33C75C}"/>
+              <a16:creationId xmlns:a16="http://schemas.microsoft.com/office/drawing/2014/main" id="{1EAA39DE-6E1C-CF2B-7FA2-BA8E7EBBA824}"/>
             </a:ext>
           </a:extLst>
         </p:cNvPr>
@@ -6586,7 +7044,7 @@
           <p:cNvPr id="9" name="Rectangle 8">
             <a:extLst>
               <a:ext uri="{FF2B5EF4-FFF2-40B4-BE49-F238E27FC236}">
-                <a16:creationId xmlns:a16="http://schemas.microsoft.com/office/drawing/2014/main" id="{0FFEC641-6CE1-9E59-D10B-91F99BAE9ED3}"/>
+                <a16:creationId xmlns:a16="http://schemas.microsoft.com/office/drawing/2014/main" id="{C6214E67-BE29-D8DD-F1B3-694FF27B36BE}"/>
               </a:ext>
               <a:ext uri="{C183D7F6-B498-43B3-948B-1728B52AA6E4}">
                 <adec:decorative xmlns:adec="http://schemas.microsoft.com/office/drawing/2017/decorative" val="1"/>
@@ -6649,7 +7107,7 @@
           <p:cNvPr id="11" name="Rectangle 10">
             <a:extLst>
               <a:ext uri="{FF2B5EF4-FFF2-40B4-BE49-F238E27FC236}">
-                <a16:creationId xmlns:a16="http://schemas.microsoft.com/office/drawing/2014/main" id="{809470E2-85AC-6756-A51A-341A8BB34B58}"/>
+                <a16:creationId xmlns:a16="http://schemas.microsoft.com/office/drawing/2014/main" id="{B99BE40B-D9FC-B573-819B-6720056BF44C}"/>
               </a:ext>
               <a:ext uri="{C183D7F6-B498-43B3-948B-1728B52AA6E4}">
                 <adec:decorative xmlns:adec="http://schemas.microsoft.com/office/drawing/2017/decorative" val="1"/>
@@ -6712,7 +7170,7 @@
           <p:cNvPr id="2" name="Title 1">
             <a:extLst>
               <a:ext uri="{FF2B5EF4-FFF2-40B4-BE49-F238E27FC236}">
-                <a16:creationId xmlns:a16="http://schemas.microsoft.com/office/drawing/2014/main" id="{BD5EDA13-44ED-62EE-3BDD-B26B2DC40A76}"/>
+                <a16:creationId xmlns:a16="http://schemas.microsoft.com/office/drawing/2014/main" id="{4CB35FB5-4555-D466-D4AE-3D2DD5FDA4BC}"/>
               </a:ext>
             </a:extLst>
           </p:cNvPr>
@@ -6756,7 +7214,7 @@
                 <a:ea typeface="+mj-ea"/>
                 <a:cs typeface="+mj-cs"/>
               </a:rPr>
-              <a:t>Problem:</a:t>
+              <a:t>Solution 2:</a:t>
             </a:r>
             <a:br>
               <a:rPr lang="en-US" sz="2600" kern="1200" dirty="0">
@@ -6787,17 +7245,17 @@
                 <a:ea typeface="+mj-ea"/>
                 <a:cs typeface="+mj-cs"/>
               </a:rPr>
-              <a:t>Adjustment</a:t>
+              <a:t>linear BCA</a:t>
             </a:r>
           </a:p>
         </p:txBody>
       </p:sp>
       <p:pic>
         <p:nvPicPr>
-          <p:cNvPr id="6" name="Content Placeholder 4" descr="A comparison of angles and angles&#10;&#10;AI-generated content may be incorrect.">
-            <a:extLst>
-              <a:ext uri="{FF2B5EF4-FFF2-40B4-BE49-F238E27FC236}">
-                <a16:creationId xmlns:a16="http://schemas.microsoft.com/office/drawing/2014/main" id="{440E5710-6E78-C8BA-D3A7-64F840796B62}"/>
+          <p:cNvPr id="3" name="Picture 2">
+            <a:extLst>
+              <a:ext uri="{FF2B5EF4-FFF2-40B4-BE49-F238E27FC236}">
+                <a16:creationId xmlns:a16="http://schemas.microsoft.com/office/drawing/2014/main" id="{FFBEB78B-F755-465F-72A9-5512F7E85AE2}"/>
               </a:ext>
             </a:extLst>
           </p:cNvPr>
@@ -6809,8 +7267,66 @@
         <p:blipFill>
           <a:blip r:embed="rId2">
             <a:extLst>
-              <a:ext uri="{28A0092B-C50C-407E-A947-70E740481C1C}">
-                <a14:useLocalDpi xmlns:a14="http://schemas.microsoft.com/office/drawing/2010/main" val="0"/>
+              <a:ext uri="{BEBA8EAE-BF5A-486C-A8C5-ECC9F3942E4B}">
+                <a14:imgProps xmlns:a14="http://schemas.microsoft.com/office/drawing/2010/main">
+                  <a14:imgLayer r:embed="rId3">
+                    <a14:imgEffect>
+                      <a14:backgroundRemoval t="1727" b="98273" l="4499" r="96787">
+                        <a14:foregroundMark x1="32648" y1="3455" x2="51799" y2="6526"/>
+                        <a14:foregroundMark x1="51799" y1="6526" x2="32391" y2="27063"/>
+                        <a14:foregroundMark x1="32391" y1="27063" x2="51542" y2="38580"/>
+                        <a14:foregroundMark x1="51542" y1="38580" x2="60283" y2="60461"/>
+                        <a14:foregroundMark x1="60283" y1="60461" x2="47686" y2="66987"/>
+                        <a14:foregroundMark x1="47686" y1="66987" x2="66067" y2="84453"/>
+                        <a14:foregroundMark x1="66067" y1="84453" x2="58226" y2="80230"/>
+                        <a14:foregroundMark x1="58226" y1="80230" x2="82262" y2="89443"/>
+                        <a14:foregroundMark x1="94987" y1="48752" x2="93959" y2="32821"/>
+                        <a14:foregroundMark x1="93959" y1="32821" x2="60668" y2="5566"/>
+                        <a14:foregroundMark x1="60668" y1="5566" x2="24807" y2="5950"/>
+                        <a14:foregroundMark x1="24807" y1="5950" x2="7198" y2="22073"/>
+                        <a14:foregroundMark x1="7198" y1="22073" x2="1799" y2="64683"/>
+                        <a14:foregroundMark x1="1799" y1="64683" x2="1285" y2="88292"/>
+                        <a14:foregroundMark x1="1285" y1="88292" x2="81234" y2="95393"/>
+                        <a14:foregroundMark x1="81234" y1="95393" x2="94344" y2="86180"/>
+                        <a14:foregroundMark x1="94344" y1="86180" x2="96915" y2="60077"/>
+                        <a14:foregroundMark x1="96915" y1="60077" x2="95501" y2="46833"/>
+                        <a14:foregroundMark x1="18509" y1="30902" x2="257" y2="41459"/>
+                        <a14:foregroundMark x1="257" y1="41459" x2="3213" y2="92322"/>
+                        <a14:foregroundMark x1="3213" y1="92322" x2="20951" y2="98273"/>
+                        <a14:foregroundMark x1="20951" y1="98273" x2="42159" y2="80230"/>
+                        <a14:foregroundMark x1="42159" y1="80230" x2="44344" y2="49712"/>
+                        <a14:foregroundMark x1="44344" y1="49712" x2="30206" y2="29942"/>
+                        <a14:foregroundMark x1="30206" y1="29942" x2="16195" y2="25912"/>
+                        <a14:foregroundMark x1="16195" y1="25912" x2="15681" y2="26104"/>
+                        <a14:foregroundMark x1="32262" y1="30326" x2="16967" y2="33397"/>
+                        <a14:foregroundMark x1="16967" y1="33397" x2="4499" y2="64875"/>
+                        <a14:foregroundMark x1="4499" y1="64875" x2="21465" y2="85413"/>
+                        <a14:foregroundMark x1="21465" y1="85413" x2="29563" y2="46065"/>
+                        <a14:foregroundMark x1="29563" y1="46065" x2="16838" y2="36660"/>
+                        <a14:foregroundMark x1="69923" y1="3839" x2="62982" y2="1344"/>
+                        <a14:foregroundMark x1="62982" y1="1344" x2="49486" y2="4223"/>
+                        <a14:foregroundMark x1="49486" y1="4223" x2="63625" y2="9597"/>
+                        <a14:foregroundMark x1="63625" y1="9597" x2="63753" y2="6334"/>
+                        <a14:foregroundMark x1="55527" y1="1727" x2="54499" y2="1727"/>
+                        <a14:foregroundMark x1="74807" y1="25912" x2="62339" y2="32246"/>
+                        <a14:foregroundMark x1="62339" y1="32246" x2="52442" y2="33205"/>
+                        <a14:foregroundMark x1="52442" y1="33205" x2="69537" y2="50096"/>
+                        <a14:foregroundMark x1="69537" y1="50096" x2="83805" y2="43378"/>
+                        <a14:foregroundMark x1="83805" y1="43378" x2="74422" y2="28983"/>
+                        <a14:foregroundMark x1="74422" y1="28983" x2="71080" y2="27831"/>
+                        <a14:foregroundMark x1="62468" y1="4607" x2="62468" y2="4607"/>
+                        <a14:backgroundMark x1="51028" y1="22841" x2="51157" y2="22457"/>
+                        <a14:backgroundMark x1="63753" y1="25144" x2="63753" y2="24952"/>
+                        <a14:backgroundMark x1="64396" y1="25144" x2="62982" y2="23992"/>
+                        <a14:backgroundMark x1="63111" y1="24760" x2="61954" y2="26296"/>
+                        <a14:backgroundMark x1="61697" y1="25720" x2="64933" y2="27688"/>
+                        <a14:backgroundMark x1="64139" y1="23992" x2="63111" y2="24376"/>
+                        <a14:backgroundMark x1="49871" y1="23417" x2="51414" y2="27831"/>
+                        <a14:backgroundMark x1="52057" y1="23800" x2="49486" y2="24184"/>
+                      </a14:backgroundRemoval>
+                    </a14:imgEffect>
+                  </a14:imgLayer>
+                </a14:imgProps>
               </a:ext>
             </a:extLst>
           </a:blip>
@@ -6820,8 +7336,8 @@
         </p:blipFill>
         <p:spPr>
           <a:xfrm>
-            <a:off x="3811133" y="1345181"/>
-            <a:ext cx="7486540" cy="4697805"/>
+            <a:off x="3818166" y="947391"/>
+            <a:ext cx="7411484" cy="4963218"/>
           </a:xfrm>
           <a:prstGeom prst="rect">
             <a:avLst/>
@@ -6831,7 +7347,7 @@
     </p:spTree>
     <p:extLst>
       <p:ext uri="{BB962C8B-B14F-4D97-AF65-F5344CB8AC3E}">
-        <p14:creationId xmlns:p14="http://schemas.microsoft.com/office/powerpoint/2010/main" val="3318415008"/>
+        <p14:creationId xmlns:p14="http://schemas.microsoft.com/office/powerpoint/2010/main" val="2720941827"/>
       </p:ext>
     </p:extLst>
   </p:cSld>
